--- a/decks/Day 2/Day2-Anthropic-API-Track.pptx
+++ b/decks/Day 2/Day2-Anthropic-API-Track.pptx
@@ -17,10 +17,7 @@
     <p:sldId id="265" r:id="rId11"/>
     <p:sldId id="266" r:id="rId12"/>
   </p:sldIdLst>
-  <p:notesMasterIdLst>
-    <p:notesMasterId r:id="rId13"/>
-  </p:notesMasterIdLst>
-  <p:sldSz cx="9144000" cy="5143500"/>
+  <p:sldSz cx="9144000" cy="5143500" type="screen16x9"/>
   <p:notesSz cx="5143500" cy="9144000"/>
   <p:defaultTextStyle>
     <a:lvl1pPr marL="0" algn="l" defTabSz="914400" rtl="0" eaLnBrk="1" latinLnBrk="0" hangingPunct="1">
@@ -114,356 +111,12 @@
       </a:defRPr>
     </a:lvl9pPr>
   </p:defaultTextStyle>
+  <p:extLst>
+    <p:ext uri="{EFAFB233-063F-42B5-8137-9DF3F51BA10A}">
+      <p15:sldGuideLst xmlns:p15="http://schemas.microsoft.com/office/powerpoint/2012/main"/>
+    </p:ext>
+  </p:extLst>
 </p:presentation>
-</file>
-
-<file path=ppt/notesMasters/notesMaster1.xml><?xml version="1.0" encoding="utf-8"?>
-<p:notesMaster xmlns:a="http://schemas.openxmlformats.org/drawingml/2006/main" xmlns:r="http://schemas.openxmlformats.org/officeDocument/2006/relationships" xmlns:p="http://schemas.openxmlformats.org/presentationml/2006/main">
-  <p:cSld>
-    <p:bg>
-      <p:bgRef idx="1001">
-        <a:schemeClr val="bg1"/>
-      </p:bgRef>
-    </p:bg>
-    <p:spTree>
-      <p:nvGrpSpPr>
-        <p:cNvPr id="1" name=""/>
-        <p:cNvGrpSpPr/>
-        <p:nvPr/>
-      </p:nvGrpSpPr>
-      <p:grpSpPr>
-        <a:xfrm>
-          <a:off x="0" y="0"/>
-          <a:ext cx="0" cy="0"/>
-          <a:chOff x="0" y="0"/>
-          <a:chExt cx="0" cy="0"/>
-        </a:xfrm>
-      </p:grpSpPr>
-      <p:sp>
-        <p:nvSpPr>
-          <p:cNvPr id="2" name="Header Placeholder 1"/>
-          <p:cNvSpPr>
-            <a:spLocks noGrp="1"/>
-          </p:cNvSpPr>
-          <p:nvPr>
-            <p:ph type="hdr" sz="quarter"/>
-          </p:nvPr>
-        </p:nvSpPr>
-        <p:spPr>
-          <a:xfrm>
-            <a:off x="0" y="0"/>
-            <a:ext cx="2971800" cy="458788"/>
-          </a:xfrm>
-          <a:prstGeom prst="rect">
-            <a:avLst/>
-          </a:prstGeom>
-        </p:spPr>
-        <p:txBody>
-          <a:bodyPr vert="horz" lIns="91440" tIns="45720" rIns="91440" bIns="45720" rtlCol="0"/>
-          <a:lstStyle>
-            <a:lvl1pPr algn="l">
-              <a:defRPr sz="1200"/>
-            </a:lvl1pPr>
-          </a:lstStyle>
-          <a:p>
-            <a:endParaRPr lang="en-US"/>
-          </a:p>
-        </p:txBody>
-      </p:sp>
-      <p:sp>
-        <p:nvSpPr>
-          <p:cNvPr id="3" name="Date Placeholder 2"/>
-          <p:cNvSpPr>
-            <a:spLocks noGrp="1"/>
-          </p:cNvSpPr>
-          <p:nvPr>
-            <p:ph type="dt" idx="1"/>
-          </p:nvPr>
-        </p:nvSpPr>
-        <p:spPr>
-          <a:xfrm>
-            <a:off x="3884613" y="0"/>
-            <a:ext cx="2971800" cy="458788"/>
-          </a:xfrm>
-          <a:prstGeom prst="rect">
-            <a:avLst/>
-          </a:prstGeom>
-        </p:spPr>
-        <p:txBody>
-          <a:bodyPr vert="horz" lIns="91440" tIns="45720" rIns="91440" bIns="45720" rtlCol="0"/>
-          <a:lstStyle>
-            <a:lvl1pPr algn="r">
-              <a:defRPr sz="1200"/>
-            </a:lvl1pPr>
-          </a:lstStyle>
-          <a:p>
-            <a:fld id="{5282F153-3F37-0F45-9E97-73ACFA13230C}" type="datetimeFigureOut">
-              <a:rPr lang="en-US"/>
-              <a:t>7/23/19</a:t>
-            </a:fld>
-            <a:endParaRPr lang="en-US"/>
-          </a:p>
-        </p:txBody>
-      </p:sp>
-      <p:sp>
-        <p:nvSpPr>
-          <p:cNvPr id="4" name="Slide Image Placeholder 3"/>
-          <p:cNvSpPr>
-            <a:spLocks noGrp="1" noRot="1" noChangeAspect="1"/>
-          </p:cNvSpPr>
-          <p:nvPr>
-            <p:ph type="sldImg" idx="2"/>
-          </p:nvPr>
-        </p:nvSpPr>
-        <p:spPr>
-          <a:xfrm>
-            <a:off x="685800" y="1143000"/>
-            <a:ext cx="5486400" cy="3086100"/>
-          </a:xfrm>
-          <a:prstGeom prst="rect">
-            <a:avLst/>
-          </a:prstGeom>
-          <a:noFill/>
-          <a:ln w="12700">
-            <a:solidFill>
-              <a:prstClr val="black"/>
-            </a:solidFill>
-          </a:ln>
-        </p:spPr>
-        <p:txBody>
-          <a:bodyPr vert="horz" lIns="91440" tIns="45720" rIns="91440" bIns="45720" rtlCol="0" anchor="ctr"/>
-          <a:lstStyle/>
-          <a:p>
-            <a:endParaRPr lang="en-US"/>
-          </a:p>
-        </p:txBody>
-      </p:sp>
-      <p:sp>
-        <p:nvSpPr>
-          <p:cNvPr id="5" name="Notes Placeholder 4"/>
-          <p:cNvSpPr>
-            <a:spLocks noGrp="1"/>
-          </p:cNvSpPr>
-          <p:nvPr>
-            <p:ph type="body" sz="quarter" idx="3"/>
-          </p:nvPr>
-        </p:nvSpPr>
-        <p:spPr>
-          <a:xfrm>
-            <a:off x="685800" y="4400550"/>
-            <a:ext cx="5486400" cy="3600450"/>
-          </a:xfrm>
-          <a:prstGeom prst="rect">
-            <a:avLst/>
-          </a:prstGeom>
-        </p:spPr>
-        <p:txBody>
-          <a:bodyPr vert="horz" lIns="91440" tIns="45720" rIns="91440" bIns="45720" rtlCol="0"/>
-          <a:lstStyle/>
-          <a:p>
-            <a:pPr lvl="0"/>
-            <a:r>
-              <a:rPr lang="en-US"/>
-              <a:t>Click to edit Master text styles</a:t>
-            </a:r>
-          </a:p>
-          <a:p>
-            <a:pPr lvl="1"/>
-            <a:r>
-              <a:rPr lang="en-US"/>
-              <a:t>Second level</a:t>
-            </a:r>
-          </a:p>
-          <a:p>
-            <a:pPr lvl="2"/>
-            <a:r>
-              <a:rPr lang="en-US"/>
-              <a:t>Third level</a:t>
-            </a:r>
-          </a:p>
-          <a:p>
-            <a:pPr lvl="3"/>
-            <a:r>
-              <a:rPr lang="en-US"/>
-              <a:t>Fourth level</a:t>
-            </a:r>
-          </a:p>
-          <a:p>
-            <a:pPr lvl="4"/>
-            <a:r>
-              <a:rPr lang="en-US"/>
-              <a:t>Fifth level</a:t>
-            </a:r>
-          </a:p>
-        </p:txBody>
-      </p:sp>
-      <p:sp>
-        <p:nvSpPr>
-          <p:cNvPr id="6" name="Footer Placeholder 5"/>
-          <p:cNvSpPr>
-            <a:spLocks noGrp="1"/>
-          </p:cNvSpPr>
-          <p:nvPr>
-            <p:ph type="ftr" sz="quarter" idx="4"/>
-          </p:nvPr>
-        </p:nvSpPr>
-        <p:spPr>
-          <a:xfrm>
-            <a:off x="0" y="8685213"/>
-            <a:ext cx="2971800" cy="458787"/>
-          </a:xfrm>
-          <a:prstGeom prst="rect">
-            <a:avLst/>
-          </a:prstGeom>
-        </p:spPr>
-        <p:txBody>
-          <a:bodyPr vert="horz" lIns="91440" tIns="45720" rIns="91440" bIns="45720" rtlCol="0" anchor="b"/>
-          <a:lstStyle>
-            <a:lvl1pPr algn="l">
-              <a:defRPr sz="1200"/>
-            </a:lvl1pPr>
-          </a:lstStyle>
-          <a:p>
-            <a:endParaRPr lang="en-US"/>
-          </a:p>
-        </p:txBody>
-      </p:sp>
-      <p:sp>
-        <p:nvSpPr>
-          <p:cNvPr id="7" name="Slide Number Placeholder 6"/>
-          <p:cNvSpPr>
-            <a:spLocks noGrp="1"/>
-          </p:cNvSpPr>
-          <p:nvPr>
-            <p:ph type="sldNum" sz="quarter" idx="5"/>
-          </p:nvPr>
-        </p:nvSpPr>
-        <p:spPr>
-          <a:xfrm>
-            <a:off x="3884613" y="8685213"/>
-            <a:ext cx="2971800" cy="458787"/>
-          </a:xfrm>
-          <a:prstGeom prst="rect">
-            <a:avLst/>
-          </a:prstGeom>
-        </p:spPr>
-        <p:txBody>
-          <a:bodyPr vert="horz" lIns="91440" tIns="45720" rIns="91440" bIns="45720" rtlCol="0" anchor="b"/>
-          <a:lstStyle>
-            <a:lvl1pPr algn="r">
-              <a:defRPr sz="1200"/>
-            </a:lvl1pPr>
-          </a:lstStyle>
-          <a:p>
-            <a:fld id="{CE5E9CC1-C706-0F49-92D6-E571CC5EEA8F}" type="slidenum">
-              <a:rPr lang="en-US"/>
-              <a:t>‹#›</a:t>
-            </a:fld>
-            <a:endParaRPr lang="en-US"/>
-          </a:p>
-        </p:txBody>
-      </p:sp>
-    </p:spTree>
-    <p:extLst>
-      <p:ext uri="{BB962C8B-B14F-4D97-AF65-F5344CB8AC3E}">
-        <p14:creationId xmlns:p14="http://schemas.microsoft.com/office/powerpoint/2010/main" val="1024086991"/>
-      </p:ext>
-    </p:extLst>
-  </p:cSld>
-  <p:clrMap bg1="lt1" tx1="dk1" bg2="lt2" tx2="dk2" accent1="accent1" accent2="accent2" accent3="accent3" accent4="accent4" accent5="accent5" accent6="accent6" hlink="hlink" folHlink="folHlink"/>
-  <p:notesStyle>
-    <a:lvl1pPr marL="0" algn="l" defTabSz="914400" rtl="0" eaLnBrk="1" latinLnBrk="0" hangingPunct="1">
-      <a:defRPr sz="1200" kern="1200">
-        <a:solidFill>
-          <a:schemeClr val="tx1"/>
-        </a:solidFill>
-        <a:latin typeface="+mn-lt"/>
-        <a:ea typeface="+mn-ea"/>
-        <a:cs typeface="+mn-cs"/>
-      </a:defRPr>
-    </a:lvl1pPr>
-    <a:lvl2pPr marL="457200" algn="l" defTabSz="914400" rtl="0" eaLnBrk="1" latinLnBrk="0" hangingPunct="1">
-      <a:defRPr sz="1200" kern="1200">
-        <a:solidFill>
-          <a:schemeClr val="tx1"/>
-        </a:solidFill>
-        <a:latin typeface="+mn-lt"/>
-        <a:ea typeface="+mn-ea"/>
-        <a:cs typeface="+mn-cs"/>
-      </a:defRPr>
-    </a:lvl2pPr>
-    <a:lvl3pPr marL="914400" algn="l" defTabSz="914400" rtl="0" eaLnBrk="1" latinLnBrk="0" hangingPunct="1">
-      <a:defRPr sz="1200" kern="1200">
-        <a:solidFill>
-          <a:schemeClr val="tx1"/>
-        </a:solidFill>
-        <a:latin typeface="+mn-lt"/>
-        <a:ea typeface="+mn-ea"/>
-        <a:cs typeface="+mn-cs"/>
-      </a:defRPr>
-    </a:lvl3pPr>
-    <a:lvl4pPr marL="1371600" algn="l" defTabSz="914400" rtl="0" eaLnBrk="1" latinLnBrk="0" hangingPunct="1">
-      <a:defRPr sz="1200" kern="1200">
-        <a:solidFill>
-          <a:schemeClr val="tx1"/>
-        </a:solidFill>
-        <a:latin typeface="+mn-lt"/>
-        <a:ea typeface="+mn-ea"/>
-        <a:cs typeface="+mn-cs"/>
-      </a:defRPr>
-    </a:lvl4pPr>
-    <a:lvl5pPr marL="1828800" algn="l" defTabSz="914400" rtl="0" eaLnBrk="1" latinLnBrk="0" hangingPunct="1">
-      <a:defRPr sz="1200" kern="1200">
-        <a:solidFill>
-          <a:schemeClr val="tx1"/>
-        </a:solidFill>
-        <a:latin typeface="+mn-lt"/>
-        <a:ea typeface="+mn-ea"/>
-        <a:cs typeface="+mn-cs"/>
-      </a:defRPr>
-    </a:lvl5pPr>
-    <a:lvl6pPr marL="2286000" algn="l" defTabSz="914400" rtl="0" eaLnBrk="1" latinLnBrk="0" hangingPunct="1">
-      <a:defRPr sz="1200" kern="1200">
-        <a:solidFill>
-          <a:schemeClr val="tx1"/>
-        </a:solidFill>
-        <a:latin typeface="+mn-lt"/>
-        <a:ea typeface="+mn-ea"/>
-        <a:cs typeface="+mn-cs"/>
-      </a:defRPr>
-    </a:lvl6pPr>
-    <a:lvl7pPr marL="2743200" algn="l" defTabSz="914400" rtl="0" eaLnBrk="1" latinLnBrk="0" hangingPunct="1">
-      <a:defRPr sz="1200" kern="1200">
-        <a:solidFill>
-          <a:schemeClr val="tx1"/>
-        </a:solidFill>
-        <a:latin typeface="+mn-lt"/>
-        <a:ea typeface="+mn-ea"/>
-        <a:cs typeface="+mn-cs"/>
-      </a:defRPr>
-    </a:lvl7pPr>
-    <a:lvl8pPr marL="3200400" algn="l" defTabSz="914400" rtl="0" eaLnBrk="1" latinLnBrk="0" hangingPunct="1">
-      <a:defRPr sz="1200" kern="1200">
-        <a:solidFill>
-          <a:schemeClr val="tx1"/>
-        </a:solidFill>
-        <a:latin typeface="+mn-lt"/>
-        <a:ea typeface="+mn-ea"/>
-        <a:cs typeface="+mn-cs"/>
-      </a:defRPr>
-    </a:lvl8pPr>
-    <a:lvl9pPr marL="3657600" algn="l" defTabSz="914400" rtl="0" eaLnBrk="1" latinLnBrk="0" hangingPunct="1">
-      <a:defRPr sz="1200" kern="1200">
-        <a:solidFill>
-          <a:schemeClr val="tx1"/>
-        </a:solidFill>
-        <a:latin typeface="+mn-lt"/>
-        <a:ea typeface="+mn-ea"/>
-        <a:cs typeface="+mn-cs"/>
-      </a:defRPr>
-    </a:lvl9pPr>
-  </p:notesStyle>
-</p:notesMaster>
 </file>
 
 <file path=ppt/slideLayouts/slideLayout1.xml><?xml version="1.0" encoding="utf-8"?>
@@ -499,6 +152,11 @@
 <file path=ppt/slideMasters/slideMaster1.xml><?xml version="1.0" encoding="utf-8"?>
 <p:sldMaster xmlns:a="http://schemas.openxmlformats.org/drawingml/2006/main" xmlns:r="http://schemas.openxmlformats.org/officeDocument/2006/relationships" xmlns:p="http://schemas.openxmlformats.org/presentationml/2006/main">
   <p:cSld>
+    <p:bg>
+      <p:bgRef idx="1001">
+        <a:schemeClr val="bg1"/>
+      </p:bgRef>
+    </p:bg>
     <p:spTree>
       <p:nvGrpSpPr>
         <p:cNvPr id="1" name=""/>
@@ -781,6 +439,7 @@
         <a:solidFill>
           <a:srgbClr val="F0EEE6"/>
         </a:solidFill>
+        <a:effectLst/>
       </p:bgPr>
     </p:bg>
     <p:spTree>
@@ -816,6 +475,13 @@
           </a:solidFill>
           <a:ln/>
         </p:spPr>
+        <p:txBody>
+          <a:bodyPr/>
+          <a:lstStyle/>
+          <a:p>
+            <a:endParaRPr lang="en-US"/>
+          </a:p>
+        </p:txBody>
       </p:sp>
       <p:sp>
         <p:nvSpPr>
@@ -836,17 +502,24 @@
           </a:solidFill>
           <a:ln/>
         </p:spPr>
+        <p:txBody>
+          <a:bodyPr/>
+          <a:lstStyle/>
+          <a:p>
+            <a:endParaRPr lang="en-US"/>
+          </a:p>
+        </p:txBody>
       </p:sp>
       <p:pic>
         <p:nvPicPr>
-          <p:cNvPr id="4" name="Image 0" descr="preencoded.png">    </p:cNvPr>
+          <p:cNvPr id="4" name="Image 0" descr="preencoded.png"/>
           <p:cNvPicPr>
             <a:picLocks noChangeAspect="1"/>
           </p:cNvPicPr>
           <p:nvPr/>
         </p:nvPicPr>
         <p:blipFill>
-          <a:blip r:embed="rId1"/>
+          <a:blip r:embed="rId2"/>
           <a:stretch>
             <a:fillRect/>
           </a:stretch>
@@ -882,11 +555,11 @@
           <a:bodyPr wrap="square" lIns="0" tIns="0" rIns="0" bIns="0" rtlCol="0" anchor="ctr"/>
           <a:lstStyle/>
           <a:p>
-            <a:pPr indent="0" marL="0">
-              <a:buNone/>
-            </a:pPr>
-            <a:r>
-              <a:rPr lang="en-US" sz="1400" b="1" spc="200" kern="0" dirty="0">
+            <a:pPr marL="0" indent="0">
+              <a:buNone/>
+            </a:pPr>
+            <a:r>
+              <a:rPr lang="en-US" sz="1400" b="1" kern="0" spc="200" dirty="0">
                 <a:solidFill>
                   <a:srgbClr val="C25E40"/>
                 </a:solidFill>
@@ -921,7 +594,7 @@
           <a:bodyPr wrap="square" lIns="0" tIns="0" rIns="0" bIns="0" rtlCol="0" anchor="ctr"/>
           <a:lstStyle/>
           <a:p>
-            <a:pPr indent="0" marL="0">
+            <a:pPr marL="0" indent="0">
               <a:buNone/>
             </a:pPr>
             <a:r>
@@ -960,7 +633,7 @@
           <a:bodyPr wrap="square" lIns="0" tIns="0" rIns="0" bIns="0" rtlCol="0" anchor="ctr"/>
           <a:lstStyle/>
           <a:p>
-            <a:pPr indent="0" marL="0">
+            <a:pPr marL="0" indent="0">
               <a:buNone/>
             </a:pPr>
             <a:r>
@@ -1000,6 +673,13 @@
             <a:prstDash val="solid"/>
           </a:ln>
         </p:spPr>
+        <p:txBody>
+          <a:bodyPr/>
+          <a:lstStyle/>
+          <a:p>
+            <a:endParaRPr lang="en-US"/>
+          </a:p>
+        </p:txBody>
       </p:sp>
       <p:sp>
         <p:nvSpPr>
@@ -1022,7 +702,7 @@
           <a:bodyPr wrap="square" lIns="0" tIns="0" rIns="0" bIns="0" rtlCol="0" anchor="ctr"/>
           <a:lstStyle/>
           <a:p>
-            <a:pPr indent="0" marL="0">
+            <a:pPr marL="0" indent="0">
               <a:buNone/>
             </a:pPr>
             <a:r>
@@ -1037,45 +717,6 @@
               <a:t>dotnetclaude.com</a:t>
             </a:r>
             <a:endParaRPr lang="en-US" sz="1600" dirty="0"/>
-          </a:p>
-        </p:txBody>
-      </p:sp>
-      <p:sp>
-        <p:nvSpPr>
-          <p:cNvPr id="10" name="Text 7"/>
-          <p:cNvSpPr/>
-          <p:nvPr/>
-        </p:nvSpPr>
-        <p:spPr>
-          <a:xfrm>
-            <a:off x="640080" y="4462272"/>
-            <a:ext cx="8046720" cy="292608"/>
-          </a:xfrm>
-          <a:prstGeom prst="rect">
-            <a:avLst/>
-          </a:prstGeom>
-          <a:noFill/>
-          <a:ln/>
-        </p:spPr>
-        <p:txBody>
-          <a:bodyPr wrap="square" lIns="0" tIns="0" rIns="0" bIns="0" rtlCol="0" anchor="ctr"/>
-          <a:lstStyle/>
-          <a:p>
-            <a:pPr indent="0" marL="0">
-              <a:buNone/>
-            </a:pPr>
-            <a:r>
-              <a:rPr lang="en-US" sz="1000" i="1" dirty="0">
-                <a:solidFill>
-                  <a:srgbClr val="615C52"/>
-                </a:solidFill>
-                <a:latin typeface="Inter" pitchFamily="34" charset="0"/>
-                <a:ea typeface="Inter" pitchFamily="34" charset="-122"/>
-                <a:cs typeface="Inter" pitchFamily="34" charset="-120"/>
-              </a:rPr>
-              <a:t>Build AI-native features in idiomatic, production-quality C#</a:t>
-            </a:r>
-            <a:endParaRPr lang="en-US" sz="1000" dirty="0"/>
           </a:p>
         </p:txBody>
       </p:sp>
@@ -1095,6 +736,7 @@
         <a:solidFill>
           <a:srgbClr val="F0EEE6"/>
         </a:solidFill>
+        <a:effectLst/>
       </p:bgPr>
     </p:bg>
     <p:spTree>
@@ -1132,11 +774,11 @@
           <a:bodyPr wrap="square" lIns="0" tIns="0" rIns="0" bIns="0" rtlCol="0" anchor="ctr"/>
           <a:lstStyle/>
           <a:p>
-            <a:pPr indent="0" marL="0">
-              <a:buNone/>
-            </a:pPr>
-            <a:r>
-              <a:rPr lang="en-US" sz="1100" b="1" spc="200" kern="0" dirty="0">
+            <a:pPr marL="0" indent="0">
+              <a:buNone/>
+            </a:pPr>
+            <a:r>
+              <a:rPr lang="en-US" sz="1100" b="1" kern="0" spc="200" dirty="0">
                 <a:solidFill>
                   <a:srgbClr val="C25E40"/>
                 </a:solidFill>
@@ -1171,7 +813,7 @@
           <a:bodyPr wrap="square" lIns="0" tIns="0" rIns="0" bIns="0" rtlCol="0" anchor="ctr"/>
           <a:lstStyle/>
           <a:p>
-            <a:pPr indent="0" marL="0">
+            <a:pPr marL="0" indent="0">
               <a:buNone/>
             </a:pPr>
             <a:r>
@@ -1210,13 +852,20 @@
           </a:solidFill>
           <a:ln/>
           <a:effectLst>
-            <a:outerShdw sx="100000" sy="100000" kx="0" ky="0" algn="bl" rotWithShape="0" blurRad="88900" dist="38100" dir="5400000">
+            <a:outerShdw blurRad="88900" dist="38100" dir="5400000" algn="bl" rotWithShape="0">
               <a:srgbClr val="000000">
                 <a:alpha val="10000"/>
               </a:srgbClr>
             </a:outerShdw>
           </a:effectLst>
         </p:spPr>
+        <p:txBody>
+          <a:bodyPr/>
+          <a:lstStyle/>
+          <a:p>
+            <a:endParaRPr lang="en-US"/>
+          </a:p>
+        </p:txBody>
       </p:sp>
       <p:sp>
         <p:nvSpPr>
@@ -1239,7 +888,7 @@
           <a:bodyPr wrap="square" lIns="0" tIns="0" rIns="0" bIns="0" rtlCol="0" anchor="t"/>
           <a:lstStyle/>
           <a:p>
-            <a:pPr indent="0" marL="0">
+            <a:pPr marL="0" indent="0">
               <a:lnSpc>
                 <a:spcPct val="128000"/>
               </a:lnSpc>
@@ -1259,7 +908,7 @@
             <a:endParaRPr lang="en-US" sz="1300" dirty="0"/>
           </a:p>
           <a:p>
-            <a:pPr indent="0" marL="0">
+            <a:pPr marL="0" indent="0">
               <a:lnSpc>
                 <a:spcPct val="128000"/>
               </a:lnSpc>
@@ -1279,7 +928,7 @@
             <a:endParaRPr lang="en-US" sz="1300" dirty="0"/>
           </a:p>
           <a:p>
-            <a:pPr indent="0" marL="0">
+            <a:pPr marL="0" indent="0">
               <a:lnSpc>
                 <a:spcPct val="128000"/>
               </a:lnSpc>
@@ -1296,33 +945,72 @@
               </a:rPr>
               <a:t>│   ├─ ChatEndpoints.cs</a:t>
             </a:r>
-            <a:pPr indent="0" marL="0">
+            <a:r>
+              <a:rPr lang="en-US" sz="1300" b="1" dirty="0">
+                <a:solidFill>
+                  <a:srgbClr val="E0A04A"/>
+                </a:solidFill>
+                <a:latin typeface="Courier New" pitchFamily="34" charset="0"/>
+                <a:ea typeface="Courier New" pitchFamily="34" charset="-122"/>
+                <a:cs typeface="Courier New" pitchFamily="34" charset="-120"/>
+              </a:rPr>
+              <a:t>  ← S1</a:t>
+            </a:r>
+            <a:endParaRPr lang="en-US" sz="1300" dirty="0"/>
+          </a:p>
+          <a:p>
+            <a:pPr marL="0" indent="0">
               <a:lnSpc>
                 <a:spcPct val="128000"/>
               </a:lnSpc>
               <a:buNone/>
             </a:pPr>
             <a:r>
-              <a:rPr lang="en-US" sz="1300" b="1" dirty="0">
-                <a:solidFill>
-                  <a:srgbClr val="E0A04A"/>
+              <a:rPr lang="en-US" sz="1300" dirty="0">
+                <a:solidFill>
+                  <a:srgbClr val="E9E5DD"/>
                 </a:solidFill>
                 <a:latin typeface="Courier New" pitchFamily="34" charset="0"/>
                 <a:ea typeface="Courier New" pitchFamily="34" charset="-122"/>
                 <a:cs typeface="Courier New" pitchFamily="34" charset="-120"/>
               </a:rPr>
-              <a:t>  ← S1</a:t>
-            </a:r>
-            <a:pPr indent="0" marL="0">
+              <a:t>│   └─ AgentEndpoints.cs</a:t>
+            </a:r>
+            <a:r>
+              <a:rPr lang="en-US" sz="1300" b="1" dirty="0">
+                <a:solidFill>
+                  <a:srgbClr val="E0A04A"/>
+                </a:solidFill>
+                <a:latin typeface="Courier New" pitchFamily="34" charset="0"/>
+                <a:ea typeface="Courier New" pitchFamily="34" charset="-122"/>
+                <a:cs typeface="Courier New" pitchFamily="34" charset="-120"/>
+              </a:rPr>
+              <a:t>  ← S2</a:t>
+            </a:r>
+            <a:endParaRPr lang="en-US" sz="1300" dirty="0"/>
+          </a:p>
+          <a:p>
+            <a:pPr marL="0" indent="0">
               <a:lnSpc>
                 <a:spcPct val="128000"/>
               </a:lnSpc>
               <a:buNone/>
             </a:pPr>
+            <a:r>
+              <a:rPr lang="en-US" sz="1300" dirty="0">
+                <a:solidFill>
+                  <a:srgbClr val="E9E5DD"/>
+                </a:solidFill>
+                <a:latin typeface="Courier New" pitchFamily="34" charset="0"/>
+                <a:ea typeface="Courier New" pitchFamily="34" charset="-122"/>
+                <a:cs typeface="Courier New" pitchFamily="34" charset="-120"/>
+              </a:rPr>
+              <a:t>├─ BookTracker.Core/</a:t>
+            </a:r>
             <a:endParaRPr lang="en-US" sz="1300" dirty="0"/>
           </a:p>
           <a:p>
-            <a:pPr indent="0" marL="0">
+            <a:pPr marL="0" indent="0">
               <a:lnSpc>
                 <a:spcPct val="128000"/>
               </a:lnSpc>
@@ -1337,35 +1025,85 @@
                 <a:ea typeface="Courier New" pitchFamily="34" charset="-122"/>
                 <a:cs typeface="Courier New" pitchFamily="34" charset="-120"/>
               </a:rPr>
-              <a:t>│   └─ AgentEndpoints.cs</a:t>
-            </a:r>
-            <a:pPr indent="0" marL="0">
+              <a:t>│   └─ RagService.cs</a:t>
+            </a:r>
+            <a:r>
+              <a:rPr lang="en-US" sz="1300" b="1" dirty="0">
+                <a:solidFill>
+                  <a:srgbClr val="E0A04A"/>
+                </a:solidFill>
+                <a:latin typeface="Courier New" pitchFamily="34" charset="0"/>
+                <a:ea typeface="Courier New" pitchFamily="34" charset="-122"/>
+                <a:cs typeface="Courier New" pitchFamily="34" charset="-120"/>
+              </a:rPr>
+              <a:t>  ← S3</a:t>
+            </a:r>
+            <a:endParaRPr lang="en-US" sz="1300" dirty="0"/>
+          </a:p>
+          <a:p>
+            <a:pPr marL="0" indent="0">
               <a:lnSpc>
                 <a:spcPct val="128000"/>
               </a:lnSpc>
               <a:buNone/>
             </a:pPr>
             <a:r>
-              <a:rPr lang="en-US" sz="1300" b="1" dirty="0">
-                <a:solidFill>
-                  <a:srgbClr val="E0A04A"/>
+              <a:rPr lang="en-US" sz="1300" dirty="0">
+                <a:solidFill>
+                  <a:srgbClr val="E9E5DD"/>
                 </a:solidFill>
                 <a:latin typeface="Courier New" pitchFamily="34" charset="0"/>
                 <a:ea typeface="Courier New" pitchFamily="34" charset="-122"/>
                 <a:cs typeface="Courier New" pitchFamily="34" charset="-120"/>
               </a:rPr>
-              <a:t>  ← S2</a:t>
-            </a:r>
-            <a:pPr indent="0" marL="0">
+              <a:t>├─ BookTracker.VectorStore/</a:t>
+            </a:r>
+            <a:r>
+              <a:rPr lang="en-US" sz="1300" b="1" dirty="0">
+                <a:solidFill>
+                  <a:srgbClr val="E0A04A"/>
+                </a:solidFill>
+                <a:latin typeface="Courier New" pitchFamily="34" charset="0"/>
+                <a:ea typeface="Courier New" pitchFamily="34" charset="-122"/>
+                <a:cs typeface="Courier New" pitchFamily="34" charset="-120"/>
+              </a:rPr>
+              <a:t>  ← S3</a:t>
+            </a:r>
+            <a:endParaRPr lang="en-US" sz="1300" dirty="0"/>
+          </a:p>
+          <a:p>
+            <a:pPr marL="0" indent="0">
               <a:lnSpc>
                 <a:spcPct val="128000"/>
               </a:lnSpc>
               <a:buNone/>
             </a:pPr>
+            <a:r>
+              <a:rPr lang="en-US" sz="1300" dirty="0">
+                <a:solidFill>
+                  <a:srgbClr val="E9E5DD"/>
+                </a:solidFill>
+                <a:latin typeface="Courier New" pitchFamily="34" charset="0"/>
+                <a:ea typeface="Courier New" pitchFamily="34" charset="-122"/>
+                <a:cs typeface="Courier New" pitchFamily="34" charset="-120"/>
+              </a:rPr>
+              <a:t>├─ BookTracker.Mcp/</a:t>
+            </a:r>
+            <a:r>
+              <a:rPr lang="en-US" sz="1300" b="1" dirty="0">
+                <a:solidFill>
+                  <a:srgbClr val="E0A04A"/>
+                </a:solidFill>
+                <a:latin typeface="Courier New" pitchFamily="34" charset="0"/>
+                <a:ea typeface="Courier New" pitchFamily="34" charset="-122"/>
+                <a:cs typeface="Courier New" pitchFamily="34" charset="-120"/>
+              </a:rPr>
+              <a:t>  ← S4</a:t>
+            </a:r>
             <a:endParaRPr lang="en-US" sz="1300" dirty="0"/>
           </a:p>
           <a:p>
-            <a:pPr indent="0" marL="0">
+            <a:pPr marL="0" indent="0">
               <a:lnSpc>
                 <a:spcPct val="128000"/>
               </a:lnSpc>
@@ -1380,12 +1118,23 @@
                 <a:ea typeface="Courier New" pitchFamily="34" charset="-122"/>
                 <a:cs typeface="Courier New" pitchFamily="34" charset="-120"/>
               </a:rPr>
-              <a:t>├─ BookTracker.Core/</a:t>
+              <a:t>├─ BookTracker.Tests/</a:t>
+            </a:r>
+            <a:r>
+              <a:rPr lang="en-US" sz="1300" b="1" dirty="0">
+                <a:solidFill>
+                  <a:srgbClr val="E0A04A"/>
+                </a:solidFill>
+                <a:latin typeface="Courier New" pitchFamily="34" charset="0"/>
+                <a:ea typeface="Courier New" pitchFamily="34" charset="-122"/>
+                <a:cs typeface="Courier New" pitchFamily="34" charset="-120"/>
+              </a:rPr>
+              <a:t>  ← S5</a:t>
             </a:r>
             <a:endParaRPr lang="en-US" sz="1300" dirty="0"/>
           </a:p>
           <a:p>
-            <a:pPr indent="0" marL="0">
+            <a:pPr marL="0" indent="0">
               <a:lnSpc>
                 <a:spcPct val="128000"/>
               </a:lnSpc>
@@ -1400,14 +1149,8 @@
                 <a:ea typeface="Courier New" pitchFamily="34" charset="-122"/>
                 <a:cs typeface="Courier New" pitchFamily="34" charset="-120"/>
               </a:rPr>
-              <a:t>│   └─ RagService.cs</a:t>
-            </a:r>
-            <a:pPr indent="0" marL="0">
-              <a:lnSpc>
-                <a:spcPct val="128000"/>
-              </a:lnSpc>
-              <a:buNone/>
-            </a:pPr>
+              <a:t>└─ .github/workflows/</a:t>
+            </a:r>
             <a:r>
               <a:rPr lang="en-US" sz="1300" b="1" dirty="0">
                 <a:solidFill>
@@ -1417,178 +1160,6 @@
                 <a:ea typeface="Courier New" pitchFamily="34" charset="-122"/>
                 <a:cs typeface="Courier New" pitchFamily="34" charset="-120"/>
               </a:rPr>
-              <a:t>  ← S3</a:t>
-            </a:r>
-            <a:pPr indent="0" marL="0">
-              <a:lnSpc>
-                <a:spcPct val="128000"/>
-              </a:lnSpc>
-              <a:buNone/>
-            </a:pPr>
-            <a:endParaRPr lang="en-US" sz="1300" dirty="0"/>
-          </a:p>
-          <a:p>
-            <a:pPr indent="0" marL="0">
-              <a:lnSpc>
-                <a:spcPct val="128000"/>
-              </a:lnSpc>
-              <a:buNone/>
-            </a:pPr>
-            <a:r>
-              <a:rPr lang="en-US" sz="1300" dirty="0">
-                <a:solidFill>
-                  <a:srgbClr val="E9E5DD"/>
-                </a:solidFill>
-                <a:latin typeface="Courier New" pitchFamily="34" charset="0"/>
-                <a:ea typeface="Courier New" pitchFamily="34" charset="-122"/>
-                <a:cs typeface="Courier New" pitchFamily="34" charset="-120"/>
-              </a:rPr>
-              <a:t>├─ BookTracker.VectorStore/</a:t>
-            </a:r>
-            <a:pPr indent="0" marL="0">
-              <a:lnSpc>
-                <a:spcPct val="128000"/>
-              </a:lnSpc>
-              <a:buNone/>
-            </a:pPr>
-            <a:r>
-              <a:rPr lang="en-US" sz="1300" b="1" dirty="0">
-                <a:solidFill>
-                  <a:srgbClr val="E0A04A"/>
-                </a:solidFill>
-                <a:latin typeface="Courier New" pitchFamily="34" charset="0"/>
-                <a:ea typeface="Courier New" pitchFamily="34" charset="-122"/>
-                <a:cs typeface="Courier New" pitchFamily="34" charset="-120"/>
-              </a:rPr>
-              <a:t>  ← S3</a:t>
-            </a:r>
-            <a:pPr indent="0" marL="0">
-              <a:lnSpc>
-                <a:spcPct val="128000"/>
-              </a:lnSpc>
-              <a:buNone/>
-            </a:pPr>
-            <a:endParaRPr lang="en-US" sz="1300" dirty="0"/>
-          </a:p>
-          <a:p>
-            <a:pPr indent="0" marL="0">
-              <a:lnSpc>
-                <a:spcPct val="128000"/>
-              </a:lnSpc>
-              <a:buNone/>
-            </a:pPr>
-            <a:r>
-              <a:rPr lang="en-US" sz="1300" dirty="0">
-                <a:solidFill>
-                  <a:srgbClr val="E9E5DD"/>
-                </a:solidFill>
-                <a:latin typeface="Courier New" pitchFamily="34" charset="0"/>
-                <a:ea typeface="Courier New" pitchFamily="34" charset="-122"/>
-                <a:cs typeface="Courier New" pitchFamily="34" charset="-120"/>
-              </a:rPr>
-              <a:t>├─ BookTracker.Mcp/</a:t>
-            </a:r>
-            <a:pPr indent="0" marL="0">
-              <a:lnSpc>
-                <a:spcPct val="128000"/>
-              </a:lnSpc>
-              <a:buNone/>
-            </a:pPr>
-            <a:r>
-              <a:rPr lang="en-US" sz="1300" b="1" dirty="0">
-                <a:solidFill>
-                  <a:srgbClr val="E0A04A"/>
-                </a:solidFill>
-                <a:latin typeface="Courier New" pitchFamily="34" charset="0"/>
-                <a:ea typeface="Courier New" pitchFamily="34" charset="-122"/>
-                <a:cs typeface="Courier New" pitchFamily="34" charset="-120"/>
-              </a:rPr>
-              <a:t>  ← S4</a:t>
-            </a:r>
-            <a:pPr indent="0" marL="0">
-              <a:lnSpc>
-                <a:spcPct val="128000"/>
-              </a:lnSpc>
-              <a:buNone/>
-            </a:pPr>
-            <a:endParaRPr lang="en-US" sz="1300" dirty="0"/>
-          </a:p>
-          <a:p>
-            <a:pPr indent="0" marL="0">
-              <a:lnSpc>
-                <a:spcPct val="128000"/>
-              </a:lnSpc>
-              <a:buNone/>
-            </a:pPr>
-            <a:r>
-              <a:rPr lang="en-US" sz="1300" dirty="0">
-                <a:solidFill>
-                  <a:srgbClr val="E9E5DD"/>
-                </a:solidFill>
-                <a:latin typeface="Courier New" pitchFamily="34" charset="0"/>
-                <a:ea typeface="Courier New" pitchFamily="34" charset="-122"/>
-                <a:cs typeface="Courier New" pitchFamily="34" charset="-120"/>
-              </a:rPr>
-              <a:t>├─ BookTracker.Tests/</a:t>
-            </a:r>
-            <a:pPr indent="0" marL="0">
-              <a:lnSpc>
-                <a:spcPct val="128000"/>
-              </a:lnSpc>
-              <a:buNone/>
-            </a:pPr>
-            <a:r>
-              <a:rPr lang="en-US" sz="1300" b="1" dirty="0">
-                <a:solidFill>
-                  <a:srgbClr val="E0A04A"/>
-                </a:solidFill>
-                <a:latin typeface="Courier New" pitchFamily="34" charset="0"/>
-                <a:ea typeface="Courier New" pitchFamily="34" charset="-122"/>
-                <a:cs typeface="Courier New" pitchFamily="34" charset="-120"/>
-              </a:rPr>
-              <a:t>  ← S5</a:t>
-            </a:r>
-            <a:pPr indent="0" marL="0">
-              <a:lnSpc>
-                <a:spcPct val="128000"/>
-              </a:lnSpc>
-              <a:buNone/>
-            </a:pPr>
-            <a:endParaRPr lang="en-US" sz="1300" dirty="0"/>
-          </a:p>
-          <a:p>
-            <a:pPr indent="0" marL="0">
-              <a:lnSpc>
-                <a:spcPct val="128000"/>
-              </a:lnSpc>
-              <a:buNone/>
-            </a:pPr>
-            <a:r>
-              <a:rPr lang="en-US" sz="1300" dirty="0">
-                <a:solidFill>
-                  <a:srgbClr val="E9E5DD"/>
-                </a:solidFill>
-                <a:latin typeface="Courier New" pitchFamily="34" charset="0"/>
-                <a:ea typeface="Courier New" pitchFamily="34" charset="-122"/>
-                <a:cs typeface="Courier New" pitchFamily="34" charset="-120"/>
-              </a:rPr>
-              <a:t>└─ .github/workflows/</a:t>
-            </a:r>
-            <a:pPr indent="0" marL="0">
-              <a:lnSpc>
-                <a:spcPct val="128000"/>
-              </a:lnSpc>
-              <a:buNone/>
-            </a:pPr>
-            <a:r>
-              <a:rPr lang="en-US" sz="1300" b="1" dirty="0">
-                <a:solidFill>
-                  <a:srgbClr val="E0A04A"/>
-                </a:solidFill>
-                <a:latin typeface="Courier New" pitchFamily="34" charset="0"/>
-                <a:ea typeface="Courier New" pitchFamily="34" charset="-122"/>
-                <a:cs typeface="Courier New" pitchFamily="34" charset="-120"/>
-              </a:rPr>
               <a:t>  ← S5</a:t>
             </a:r>
             <a:endParaRPr lang="en-US" sz="1300" dirty="0"/>
@@ -1616,11 +1187,11 @@
           <a:bodyPr wrap="square" lIns="0" tIns="0" rIns="0" bIns="0" rtlCol="0" anchor="ctr"/>
           <a:lstStyle/>
           <a:p>
-            <a:pPr indent="0" marL="0">
-              <a:buNone/>
-            </a:pPr>
-            <a:r>
-              <a:rPr lang="en-US" sz="1100" b="1" spc="100" kern="0" dirty="0">
+            <a:pPr marL="0" indent="0">
+              <a:buNone/>
+            </a:pPr>
+            <a:r>
+              <a:rPr lang="en-US" sz="1100" b="1" kern="0" spc="100" dirty="0">
                 <a:solidFill>
                   <a:srgbClr val="C25E40"/>
                 </a:solidFill>
@@ -1655,6 +1226,13 @@
           </a:solidFill>
           <a:ln/>
         </p:spPr>
+        <p:txBody>
+          <a:bodyPr/>
+          <a:lstStyle/>
+          <a:p>
+            <a:endParaRPr lang="en-US"/>
+          </a:p>
+        </p:txBody>
       </p:sp>
       <p:sp>
         <p:nvSpPr>
@@ -1677,7 +1255,7 @@
           <a:bodyPr wrap="square" lIns="0" tIns="0" rIns="0" bIns="0" rtlCol="0" anchor="ctr"/>
           <a:lstStyle/>
           <a:p>
-            <a:pPr algn="ctr" indent="0" marL="0">
+            <a:pPr marL="0" indent="0" algn="ctr">
               <a:buNone/>
             </a:pPr>
             <a:r>
@@ -1716,7 +1294,7 @@
           <a:bodyPr wrap="square" lIns="0" tIns="0" rIns="0" bIns="0" rtlCol="0" anchor="ctr"/>
           <a:lstStyle/>
           <a:p>
-            <a:pPr indent="0" marL="0">
+            <a:pPr marL="0" indent="0">
               <a:buNone/>
             </a:pPr>
             <a:r>
@@ -1755,6 +1333,13 @@
           </a:solidFill>
           <a:ln/>
         </p:spPr>
+        <p:txBody>
+          <a:bodyPr/>
+          <a:lstStyle/>
+          <a:p>
+            <a:endParaRPr lang="en-US"/>
+          </a:p>
+        </p:txBody>
       </p:sp>
       <p:sp>
         <p:nvSpPr>
@@ -1777,7 +1362,7 @@
           <a:bodyPr wrap="square" lIns="0" tIns="0" rIns="0" bIns="0" rtlCol="0" anchor="ctr"/>
           <a:lstStyle/>
           <a:p>
-            <a:pPr algn="ctr" indent="0" marL="0">
+            <a:pPr marL="0" indent="0" algn="ctr">
               <a:buNone/>
             </a:pPr>
             <a:r>
@@ -1816,7 +1401,7 @@
           <a:bodyPr wrap="square" lIns="0" tIns="0" rIns="0" bIns="0" rtlCol="0" anchor="ctr"/>
           <a:lstStyle/>
           <a:p>
-            <a:pPr indent="0" marL="0">
+            <a:pPr marL="0" indent="0">
               <a:buNone/>
             </a:pPr>
             <a:r>
@@ -1855,6 +1440,13 @@
           </a:solidFill>
           <a:ln/>
         </p:spPr>
+        <p:txBody>
+          <a:bodyPr/>
+          <a:lstStyle/>
+          <a:p>
+            <a:endParaRPr lang="en-US"/>
+          </a:p>
+        </p:txBody>
       </p:sp>
       <p:sp>
         <p:nvSpPr>
@@ -1877,7 +1469,7 @@
           <a:bodyPr wrap="square" lIns="0" tIns="0" rIns="0" bIns="0" rtlCol="0" anchor="ctr"/>
           <a:lstStyle/>
           <a:p>
-            <a:pPr algn="ctr" indent="0" marL="0">
+            <a:pPr marL="0" indent="0" algn="ctr">
               <a:buNone/>
             </a:pPr>
             <a:r>
@@ -1916,7 +1508,7 @@
           <a:bodyPr wrap="square" lIns="0" tIns="0" rIns="0" bIns="0" rtlCol="0" anchor="ctr"/>
           <a:lstStyle/>
           <a:p>
-            <a:pPr indent="0" marL="0">
+            <a:pPr marL="0" indent="0">
               <a:buNone/>
             </a:pPr>
             <a:r>
@@ -1955,6 +1547,13 @@
           </a:solidFill>
           <a:ln/>
         </p:spPr>
+        <p:txBody>
+          <a:bodyPr/>
+          <a:lstStyle/>
+          <a:p>
+            <a:endParaRPr lang="en-US"/>
+          </a:p>
+        </p:txBody>
       </p:sp>
       <p:sp>
         <p:nvSpPr>
@@ -1977,7 +1576,7 @@
           <a:bodyPr wrap="square" lIns="0" tIns="0" rIns="0" bIns="0" rtlCol="0" anchor="ctr"/>
           <a:lstStyle/>
           <a:p>
-            <a:pPr algn="ctr" indent="0" marL="0">
+            <a:pPr marL="0" indent="0" algn="ctr">
               <a:buNone/>
             </a:pPr>
             <a:r>
@@ -2016,7 +1615,7 @@
           <a:bodyPr wrap="square" lIns="0" tIns="0" rIns="0" bIns="0" rtlCol="0" anchor="ctr"/>
           <a:lstStyle/>
           <a:p>
-            <a:pPr indent="0" marL="0">
+            <a:pPr marL="0" indent="0">
               <a:buNone/>
             </a:pPr>
             <a:r>
@@ -2055,6 +1654,13 @@
           </a:solidFill>
           <a:ln/>
         </p:spPr>
+        <p:txBody>
+          <a:bodyPr/>
+          <a:lstStyle/>
+          <a:p>
+            <a:endParaRPr lang="en-US"/>
+          </a:p>
+        </p:txBody>
       </p:sp>
       <p:sp>
         <p:nvSpPr>
@@ -2077,7 +1683,7 @@
           <a:bodyPr wrap="square" lIns="0" tIns="0" rIns="0" bIns="0" rtlCol="0" anchor="ctr"/>
           <a:lstStyle/>
           <a:p>
-            <a:pPr algn="ctr" indent="0" marL="0">
+            <a:pPr marL="0" indent="0" algn="ctr">
               <a:buNone/>
             </a:pPr>
             <a:r>
@@ -2116,7 +1722,7 @@
           <a:bodyPr wrap="square" lIns="0" tIns="0" rIns="0" bIns="0" rtlCol="0" anchor="ctr"/>
           <a:lstStyle/>
           <a:p>
-            <a:pPr indent="0" marL="0">
+            <a:pPr marL="0" indent="0">
               <a:buNone/>
             </a:pPr>
             <a:r>
@@ -2155,7 +1761,7 @@
           <a:bodyPr wrap="square" rtlCol="0" anchor="ctr"/>
           <a:lstStyle/>
           <a:p>
-            <a:pPr indent="0" marL="0">
+            <a:pPr marL="0" indent="0">
               <a:buNone/>
             </a:pPr>
             <a:r>
@@ -2194,7 +1800,7 @@
           <a:bodyPr wrap="square" rtlCol="0" anchor="ctr"/>
           <a:lstStyle/>
           <a:p>
-            <a:pPr algn="r" indent="0" marL="0">
+            <a:pPr marL="0" indent="0" algn="r">
               <a:buNone/>
             </a:pPr>
             <a:r>
@@ -2209,45 +1815,6 @@
               <a:t>Day 2  ·  10/11</a:t>
             </a:r>
             <a:endParaRPr lang="en-US" sz="900" dirty="0"/>
-          </a:p>
-        </p:txBody>
-      </p:sp>
-      <p:sp>
-        <p:nvSpPr>
-          <p:cNvPr id="24" name="Text 22"/>
-          <p:cNvSpPr/>
-          <p:nvPr/>
-        </p:nvSpPr>
-        <p:spPr>
-          <a:xfrm>
-            <a:off x="548640" y="4462272"/>
-            <a:ext cx="8046720" cy="274320"/>
-          </a:xfrm>
-          <a:prstGeom prst="rect">
-            <a:avLst/>
-          </a:prstGeom>
-          <a:noFill/>
-          <a:ln/>
-        </p:spPr>
-        <p:txBody>
-          <a:bodyPr wrap="square" lIns="0" tIns="0" rIns="0" bIns="0" rtlCol="0" anchor="ctr"/>
-          <a:lstStyle/>
-          <a:p>
-            <a:pPr indent="0" marL="0">
-              <a:buNone/>
-            </a:pPr>
-            <a:r>
-              <a:rPr lang="en-US" sz="1000" i="1" dirty="0">
-                <a:solidFill>
-                  <a:srgbClr val="615C52"/>
-                </a:solidFill>
-                <a:latin typeface="Inter" pitchFamily="34" charset="0"/>
-                <a:ea typeface="Inter" pitchFamily="34" charset="-122"/>
-                <a:cs typeface="Inter" pitchFamily="34" charset="-120"/>
-              </a:rPr>
-              <a:t>▸ One growing solution — each session adds the next labeled piece.</a:t>
-            </a:r>
-            <a:endParaRPr lang="en-US" sz="1000" dirty="0"/>
           </a:p>
         </p:txBody>
       </p:sp>
@@ -2267,6 +1834,7 @@
         <a:solidFill>
           <a:srgbClr val="F0EEE6"/>
         </a:solidFill>
+        <a:effectLst/>
       </p:bgPr>
     </p:bg>
     <p:spTree>
@@ -2304,11 +1872,11 @@
           <a:bodyPr wrap="square" lIns="0" tIns="0" rIns="0" bIns="0" rtlCol="0" anchor="ctr"/>
           <a:lstStyle/>
           <a:p>
-            <a:pPr indent="0" marL="0">
-              <a:buNone/>
-            </a:pPr>
-            <a:r>
-              <a:rPr lang="en-US" sz="1100" b="1" spc="200" kern="0" dirty="0">
+            <a:pPr marL="0" indent="0">
+              <a:buNone/>
+            </a:pPr>
+            <a:r>
+              <a:rPr lang="en-US" sz="1100" b="1" kern="0" spc="200" dirty="0">
                 <a:solidFill>
                   <a:srgbClr val="C25E40"/>
                 </a:solidFill>
@@ -2343,7 +1911,7 @@
           <a:bodyPr wrap="square" lIns="0" tIns="0" rIns="0" bIns="0" rtlCol="0" anchor="ctr"/>
           <a:lstStyle/>
           <a:p>
-            <a:pPr indent="0" marL="0">
+            <a:pPr marL="0" indent="0">
               <a:buNone/>
             </a:pPr>
             <a:r>
@@ -2382,13 +1950,20 @@
           </a:solidFill>
           <a:ln/>
           <a:effectLst>
-            <a:outerShdw sx="100000" sy="100000" kx="0" ky="0" algn="bl" rotWithShape="0" blurRad="88900" dist="38100" dir="5400000">
+            <a:outerShdw blurRad="88900" dist="38100" dir="5400000" algn="bl" rotWithShape="0">
               <a:srgbClr val="000000">
                 <a:alpha val="10000"/>
               </a:srgbClr>
             </a:outerShdw>
           </a:effectLst>
         </p:spPr>
+        <p:txBody>
+          <a:bodyPr/>
+          <a:lstStyle/>
+          <a:p>
+            <a:endParaRPr lang="en-US"/>
+          </a:p>
+        </p:txBody>
       </p:sp>
       <p:sp>
         <p:nvSpPr>
@@ -2409,107 +1984,17 @@
           </a:solidFill>
           <a:ln/>
         </p:spPr>
+        <p:txBody>
+          <a:bodyPr/>
+          <a:lstStyle/>
+          <a:p>
+            <a:endParaRPr lang="en-US"/>
+          </a:p>
+        </p:txBody>
       </p:sp>
       <p:pic>
         <p:nvPicPr>
-          <p:cNvPr id="6" name="Image 0" descr="preencoded.png">    </p:cNvPr>
-          <p:cNvPicPr>
-            <a:picLocks noChangeAspect="1"/>
-          </p:cNvPicPr>
-          <p:nvPr/>
-        </p:nvPicPr>
-        <p:blipFill>
-          <a:blip r:embed="rId1"/>
-          <a:stretch>
-            <a:fillRect/>
-          </a:stretch>
-        </p:blipFill>
-        <p:spPr>
-          <a:xfrm>
-            <a:off x="972007" y="1886407"/>
-            <a:ext cx="241402" cy="241402"/>
-          </a:xfrm>
-          <a:prstGeom prst="rect">
-            <a:avLst/>
-          </a:prstGeom>
-        </p:spPr>
-      </p:pic>
-      <p:sp>
-        <p:nvSpPr>
-          <p:cNvPr id="7" name="Text 4"/>
-          <p:cNvSpPr/>
-          <p:nvPr/>
-        </p:nvSpPr>
-        <p:spPr>
-          <a:xfrm>
-            <a:off x="1572768" y="1463040"/>
-            <a:ext cx="6766560" cy="1051560"/>
-          </a:xfrm>
-          <a:prstGeom prst="rect">
-            <a:avLst/>
-          </a:prstGeom>
-          <a:noFill/>
-          <a:ln/>
-        </p:spPr>
-        <p:txBody>
-          <a:bodyPr wrap="square" lIns="0" tIns="0" rIns="0" bIns="0" rtlCol="0" anchor="ctr"/>
-          <a:lstStyle/>
-          <a:p>
-            <a:pPr indent="0" marL="0">
-              <a:buNone/>
-            </a:pPr>
-            <a:r>
-              <a:rPr lang="en-US" sz="1700" b="1" dirty="0">
-                <a:solidFill>
-                  <a:srgbClr val="141413"/>
-                </a:solidFill>
-                <a:latin typeface="Inter" pitchFamily="34" charset="0"/>
-                <a:ea typeface="Inter" pitchFamily="34" charset="-122"/>
-                <a:cs typeface="Inter" pitchFamily="34" charset="-120"/>
-              </a:rPr>
-              <a:t>Yesterday's rules, skills, hooks &amp; plugin </a:t>
-            </a:r>
-            <a:pPr indent="0" marL="0">
-              <a:buNone/>
-            </a:pPr>
-            <a:r>
-              <a:rPr lang="en-US" sz="1700" dirty="0">
-                <a:solidFill>
-                  <a:srgbClr val="141413"/>
-                </a:solidFill>
-                <a:latin typeface="Inter" pitchFamily="34" charset="0"/>
-                <a:ea typeface="Inter" pitchFamily="34" charset="-122"/>
-                <a:cs typeface="Inter" pitchFamily="34" charset="-120"/>
-              </a:rPr>
-              <a:t>travel into today's code.</a:t>
-            </a:r>
-            <a:endParaRPr lang="en-US" sz="1700" dirty="0"/>
-          </a:p>
-        </p:txBody>
-      </p:sp>
-      <p:sp>
-        <p:nvSpPr>
-          <p:cNvPr id="8" name="Shape 5"/>
-          <p:cNvSpPr/>
-          <p:nvPr/>
-        </p:nvSpPr>
-        <p:spPr>
-          <a:xfrm>
-            <a:off x="566928" y="2743200"/>
-            <a:ext cx="420624" cy="420624"/>
-          </a:xfrm>
-          <a:prstGeom prst="ellipse">
-            <a:avLst/>
-          </a:prstGeom>
-          <a:solidFill>
-            <a:srgbClr val="D97757"/>
-          </a:solidFill>
-          <a:ln/>
-        </p:spPr>
-      </p:sp>
-      <p:pic>
-        <p:nvPicPr>
-          <p:cNvPr id="9" name="Image 1" descr="preencoded.png">    </p:cNvPr>
+          <p:cNvPr id="6" name="Image 0" descr="preencoded.png"/>
           <p:cNvPicPr>
             <a:picLocks noChangeAspect="1"/>
           </p:cNvPicPr>
@@ -2523,8 +2008,8 @@
         </p:blipFill>
         <p:spPr>
           <a:xfrm>
-            <a:off x="676290" y="2852562"/>
-            <a:ext cx="201900" cy="201900"/>
+            <a:off x="972007" y="1886407"/>
+            <a:ext cx="241402" cy="241402"/>
           </a:xfrm>
           <a:prstGeom prst="rect">
             <a:avLst/>
@@ -2533,14 +2018,14 @@
       </p:pic>
       <p:sp>
         <p:nvSpPr>
-          <p:cNvPr id="10" name="Text 6"/>
-          <p:cNvSpPr/>
-          <p:nvPr/>
-        </p:nvSpPr>
-        <p:spPr>
-          <a:xfrm>
-            <a:off x="1133856" y="2706624"/>
-            <a:ext cx="3931920" cy="292608"/>
+          <p:cNvPr id="7" name="Text 4"/>
+          <p:cNvSpPr/>
+          <p:nvPr/>
+        </p:nvSpPr>
+        <p:spPr>
+          <a:xfrm>
+            <a:off x="1572768" y="1463040"/>
+            <a:ext cx="6766560" cy="1051560"/>
           </a:xfrm>
           <a:prstGeom prst="rect">
             <a:avLst/>
@@ -2552,11 +2037,11 @@
           <a:bodyPr wrap="square" lIns="0" tIns="0" rIns="0" bIns="0" rtlCol="0" anchor="ctr"/>
           <a:lstStyle/>
           <a:p>
-            <a:pPr indent="0" marL="0">
-              <a:buNone/>
-            </a:pPr>
-            <a:r>
-              <a:rPr lang="en-US" sz="1450" b="1" dirty="0">
+            <a:pPr marL="0" indent="0">
+              <a:buNone/>
+            </a:pPr>
+            <a:r>
+              <a:rPr lang="en-US" sz="1700" b="1" dirty="0">
                 <a:solidFill>
                   <a:srgbClr val="141413"/>
                 </a:solidFill>
@@ -2564,60 +2049,32 @@
                 <a:ea typeface="Inter" pitchFamily="34" charset="-122"/>
                 <a:cs typeface="Inter" pitchFamily="34" charset="-120"/>
               </a:rPr>
-              <a:t>The build / test hook</a:t>
-            </a:r>
-            <a:endParaRPr lang="en-US" sz="1450" dirty="0"/>
-          </a:p>
-        </p:txBody>
-      </p:sp>
-      <p:sp>
-        <p:nvSpPr>
-          <p:cNvPr id="11" name="Text 7"/>
-          <p:cNvSpPr/>
-          <p:nvPr/>
-        </p:nvSpPr>
-        <p:spPr>
-          <a:xfrm>
-            <a:off x="5029200" y="2706624"/>
-            <a:ext cx="3474720" cy="292608"/>
-          </a:xfrm>
-          <a:prstGeom prst="rect">
-            <a:avLst/>
-          </a:prstGeom>
-          <a:noFill/>
-          <a:ln/>
-        </p:spPr>
-        <p:txBody>
-          <a:bodyPr wrap="square" lIns="0" tIns="0" rIns="0" bIns="0" rtlCol="0" anchor="ctr"/>
-          <a:lstStyle/>
-          <a:p>
-            <a:pPr indent="0" marL="0">
-              <a:buNone/>
-            </a:pPr>
-            <a:r>
-              <a:rPr lang="en-US" sz="1200" dirty="0">
-                <a:solidFill>
-                  <a:srgbClr val="615C52"/>
+              <a:t>Yesterday's rules, skills, hooks &amp; plugin </a:t>
+            </a:r>
+            <a:r>
+              <a:rPr lang="en-US" sz="1700" dirty="0">
+                <a:solidFill>
+                  <a:srgbClr val="141413"/>
                 </a:solidFill>
                 <a:latin typeface="Inter" pitchFamily="34" charset="0"/>
                 <a:ea typeface="Inter" pitchFamily="34" charset="-122"/>
                 <a:cs typeface="Inter" pitchFamily="34" charset="-120"/>
               </a:rPr>
-              <a:t>Surfaces failures as you write API code</a:t>
-            </a:r>
-            <a:endParaRPr lang="en-US" sz="1200" dirty="0"/>
-          </a:p>
-        </p:txBody>
-      </p:sp>
-      <p:sp>
-        <p:nvSpPr>
-          <p:cNvPr id="12" name="Shape 8"/>
-          <p:cNvSpPr/>
-          <p:nvPr/>
-        </p:nvSpPr>
-        <p:spPr>
-          <a:xfrm>
-            <a:off x="566928" y="3246120"/>
+              <a:t>travel into today's code.</a:t>
+            </a:r>
+            <a:endParaRPr lang="en-US" sz="1700" dirty="0"/>
+          </a:p>
+        </p:txBody>
+      </p:sp>
+      <p:sp>
+        <p:nvSpPr>
+          <p:cNvPr id="8" name="Shape 5"/>
+          <p:cNvSpPr/>
+          <p:nvPr/>
+        </p:nvSpPr>
+        <p:spPr>
+          <a:xfrm>
+            <a:off x="566928" y="2743200"/>
             <a:ext cx="420624" cy="420624"/>
           </a:xfrm>
           <a:prstGeom prst="ellipse">
@@ -2628,10 +2085,17 @@
           </a:solidFill>
           <a:ln/>
         </p:spPr>
+        <p:txBody>
+          <a:bodyPr/>
+          <a:lstStyle/>
+          <a:p>
+            <a:endParaRPr lang="en-US"/>
+          </a:p>
+        </p:txBody>
       </p:sp>
       <p:pic>
         <p:nvPicPr>
-          <p:cNvPr id="13" name="Image 2" descr="preencoded.png">    </p:cNvPr>
+          <p:cNvPr id="9" name="Image 1" descr="preencoded.png"/>
           <p:cNvPicPr>
             <a:picLocks noChangeAspect="1"/>
           </p:cNvPicPr>
@@ -2645,7 +2109,7 @@
         </p:blipFill>
         <p:spPr>
           <a:xfrm>
-            <a:off x="676290" y="3355482"/>
+            <a:off x="676290" y="2852562"/>
             <a:ext cx="201900" cy="201900"/>
           </a:xfrm>
           <a:prstGeom prst="rect">
@@ -2655,13 +2119,13 @@
       </p:pic>
       <p:sp>
         <p:nvSpPr>
-          <p:cNvPr id="14" name="Text 9"/>
-          <p:cNvSpPr/>
-          <p:nvPr/>
-        </p:nvSpPr>
-        <p:spPr>
-          <a:xfrm>
-            <a:off x="1133856" y="3209544"/>
+          <p:cNvPr id="10" name="Text 6"/>
+          <p:cNvSpPr/>
+          <p:nvPr/>
+        </p:nvSpPr>
+        <p:spPr>
+          <a:xfrm>
+            <a:off x="1133856" y="2706624"/>
             <a:ext cx="3931920" cy="292608"/>
           </a:xfrm>
           <a:prstGeom prst="rect">
@@ -2674,7 +2138,7 @@
           <a:bodyPr wrap="square" lIns="0" tIns="0" rIns="0" bIns="0" rtlCol="0" anchor="ctr"/>
           <a:lstStyle/>
           <a:p>
-            <a:pPr indent="0" marL="0">
+            <a:pPr marL="0" indent="0">
               <a:buNone/>
             </a:pPr>
             <a:r>
@@ -2686,7 +2150,7 @@
                 <a:ea typeface="Inter" pitchFamily="34" charset="-122"/>
                 <a:cs typeface="Inter" pitchFamily="34" charset="-120"/>
               </a:rPr>
-              <a:t>Your guardrails</a:t>
+              <a:t>The build / test hook</a:t>
             </a:r>
             <a:endParaRPr lang="en-US" sz="1450" dirty="0"/>
           </a:p>
@@ -2694,13 +2158,13 @@
       </p:sp>
       <p:sp>
         <p:nvSpPr>
-          <p:cNvPr id="15" name="Text 10"/>
-          <p:cNvSpPr/>
-          <p:nvPr/>
-        </p:nvSpPr>
-        <p:spPr>
-          <a:xfrm>
-            <a:off x="5029200" y="3209544"/>
+          <p:cNvPr id="11" name="Text 7"/>
+          <p:cNvSpPr/>
+          <p:nvPr/>
+        </p:nvSpPr>
+        <p:spPr>
+          <a:xfrm>
+            <a:off x="5029200" y="2706624"/>
             <a:ext cx="3474720" cy="292608"/>
           </a:xfrm>
           <a:prstGeom prst="rect">
@@ -2713,7 +2177,7 @@
           <a:bodyPr wrap="square" lIns="0" tIns="0" rIns="0" bIns="0" rtlCol="0" anchor="ctr"/>
           <a:lstStyle/>
           <a:p>
-            <a:pPr indent="0" marL="0">
+            <a:pPr marL="0" indent="0">
               <a:buNone/>
             </a:pPr>
             <a:r>
@@ -2725,7 +2189,7 @@
                 <a:ea typeface="Inter" pitchFamily="34" charset="-122"/>
                 <a:cs typeface="Inter" pitchFamily="34" charset="-120"/>
               </a:rPr>
-              <a:t>Keep generated C# on-convention</a:t>
+              <a:t>Surfaces failures as you write API code</a:t>
             </a:r>
             <a:endParaRPr lang="en-US" sz="1200" dirty="0"/>
           </a:p>
@@ -2733,13 +2197,13 @@
       </p:sp>
       <p:sp>
         <p:nvSpPr>
-          <p:cNvPr id="16" name="Shape 11"/>
-          <p:cNvSpPr/>
-          <p:nvPr/>
-        </p:nvSpPr>
-        <p:spPr>
-          <a:xfrm>
-            <a:off x="566928" y="3749040"/>
+          <p:cNvPr id="12" name="Shape 8"/>
+          <p:cNvSpPr/>
+          <p:nvPr/>
+        </p:nvSpPr>
+        <p:spPr>
+          <a:xfrm>
+            <a:off x="566928" y="3246120"/>
             <a:ext cx="420624" cy="420624"/>
           </a:xfrm>
           <a:prstGeom prst="ellipse">
@@ -2750,10 +2214,17 @@
           </a:solidFill>
           <a:ln/>
         </p:spPr>
+        <p:txBody>
+          <a:bodyPr/>
+          <a:lstStyle/>
+          <a:p>
+            <a:endParaRPr lang="en-US"/>
+          </a:p>
+        </p:txBody>
       </p:sp>
       <p:pic>
         <p:nvPicPr>
-          <p:cNvPr id="17" name="Image 3" descr="preencoded.png">    </p:cNvPr>
+          <p:cNvPr id="13" name="Image 2" descr="preencoded.png"/>
           <p:cNvPicPr>
             <a:picLocks noChangeAspect="1"/>
           </p:cNvPicPr>
@@ -2767,7 +2238,7 @@
         </p:blipFill>
         <p:spPr>
           <a:xfrm>
-            <a:off x="676290" y="3858402"/>
+            <a:off x="676290" y="3355482"/>
             <a:ext cx="201900" cy="201900"/>
           </a:xfrm>
           <a:prstGeom prst="rect">
@@ -2777,13 +2248,13 @@
       </p:pic>
       <p:sp>
         <p:nvSpPr>
-          <p:cNvPr id="18" name="Text 12"/>
-          <p:cNvSpPr/>
-          <p:nvPr/>
-        </p:nvSpPr>
-        <p:spPr>
-          <a:xfrm>
-            <a:off x="1133856" y="3712464"/>
+          <p:cNvPr id="14" name="Text 9"/>
+          <p:cNvSpPr/>
+          <p:nvPr/>
+        </p:nvSpPr>
+        <p:spPr>
+          <a:xfrm>
+            <a:off x="1133856" y="3209544"/>
             <a:ext cx="3931920" cy="292608"/>
           </a:xfrm>
           <a:prstGeom prst="rect">
@@ -2796,7 +2267,7 @@
           <a:bodyPr wrap="square" lIns="0" tIns="0" rIns="0" bIns="0" rtlCol="0" anchor="ctr"/>
           <a:lstStyle/>
           <a:p>
-            <a:pPr indent="0" marL="0">
+            <a:pPr marL="0" indent="0">
               <a:buNone/>
             </a:pPr>
             <a:r>
@@ -2808,7 +2279,7 @@
                 <a:ea typeface="Inter" pitchFamily="34" charset="-122"/>
                 <a:cs typeface="Inter" pitchFamily="34" charset="-120"/>
               </a:rPr>
-              <a:t>Same .claude/, new work</a:t>
+              <a:t>Your guardrails</a:t>
             </a:r>
             <a:endParaRPr lang="en-US" sz="1450" dirty="0"/>
           </a:p>
@@ -2816,13 +2287,13 @@
       </p:sp>
       <p:sp>
         <p:nvSpPr>
-          <p:cNvPr id="19" name="Text 13"/>
-          <p:cNvSpPr/>
-          <p:nvPr/>
-        </p:nvSpPr>
-        <p:spPr>
-          <a:xfrm>
-            <a:off x="5029200" y="3712464"/>
+          <p:cNvPr id="15" name="Text 10"/>
+          <p:cNvSpPr/>
+          <p:nvPr/>
+        </p:nvSpPr>
+        <p:spPr>
+          <a:xfrm>
+            <a:off x="5029200" y="3209544"/>
             <a:ext cx="3474720" cy="292608"/>
           </a:xfrm>
           <a:prstGeom prst="rect">
@@ -2835,7 +2306,7 @@
           <a:bodyPr wrap="square" lIns="0" tIns="0" rIns="0" bIns="0" rtlCol="0" anchor="ctr"/>
           <a:lstStyle/>
           <a:p>
-            <a:pPr indent="0" marL="0">
+            <a:pPr marL="0" indent="0">
               <a:buNone/>
             </a:pPr>
             <a:r>
@@ -2847,7 +2318,7 @@
                 <a:ea typeface="Inter" pitchFamily="34" charset="-122"/>
                 <a:cs typeface="Inter" pitchFamily="34" charset="-120"/>
               </a:rPr>
-              <a:t>Steering you built once keeps paying off</a:t>
+              <a:t>Keep generated C# on-convention</a:t>
             </a:r>
             <a:endParaRPr lang="en-US" sz="1200" dirty="0"/>
           </a:p>
@@ -2855,14 +2326,65 @@
       </p:sp>
       <p:sp>
         <p:nvSpPr>
-          <p:cNvPr id="20" name="Text 14"/>
-          <p:cNvSpPr/>
-          <p:nvPr/>
-        </p:nvSpPr>
-        <p:spPr>
-          <a:xfrm>
-            <a:off x="548640" y="4828032"/>
-            <a:ext cx="3657600" cy="274320"/>
+          <p:cNvPr id="16" name="Shape 11"/>
+          <p:cNvSpPr/>
+          <p:nvPr/>
+        </p:nvSpPr>
+        <p:spPr>
+          <a:xfrm>
+            <a:off x="566928" y="3749040"/>
+            <a:ext cx="420624" cy="420624"/>
+          </a:xfrm>
+          <a:prstGeom prst="ellipse">
+            <a:avLst/>
+          </a:prstGeom>
+          <a:solidFill>
+            <a:srgbClr val="D97757"/>
+          </a:solidFill>
+          <a:ln/>
+        </p:spPr>
+        <p:txBody>
+          <a:bodyPr/>
+          <a:lstStyle/>
+          <a:p>
+            <a:endParaRPr lang="en-US"/>
+          </a:p>
+        </p:txBody>
+      </p:sp>
+      <p:pic>
+        <p:nvPicPr>
+          <p:cNvPr id="17" name="Image 3" descr="preencoded.png"/>
+          <p:cNvPicPr>
+            <a:picLocks noChangeAspect="1"/>
+          </p:cNvPicPr>
+          <p:nvPr/>
+        </p:nvPicPr>
+        <p:blipFill>
+          <a:blip r:embed="rId5"/>
+          <a:stretch>
+            <a:fillRect/>
+          </a:stretch>
+        </p:blipFill>
+        <p:spPr>
+          <a:xfrm>
+            <a:off x="676290" y="3858402"/>
+            <a:ext cx="201900" cy="201900"/>
+          </a:xfrm>
+          <a:prstGeom prst="rect">
+            <a:avLst/>
+          </a:prstGeom>
+        </p:spPr>
+      </p:pic>
+      <p:sp>
+        <p:nvSpPr>
+          <p:cNvPr id="18" name="Text 12"/>
+          <p:cNvSpPr/>
+          <p:nvPr/>
+        </p:nvSpPr>
+        <p:spPr>
+          <a:xfrm>
+            <a:off x="1133856" y="3712464"/>
+            <a:ext cx="3931920" cy="292608"/>
           </a:xfrm>
           <a:prstGeom prst="rect">
             <a:avLst/>
@@ -2871,37 +2393,37 @@
           <a:ln/>
         </p:spPr>
         <p:txBody>
-          <a:bodyPr wrap="square" rtlCol="0" anchor="ctr"/>
-          <a:lstStyle/>
-          <a:p>
-            <a:pPr indent="0" marL="0">
-              <a:buNone/>
-            </a:pPr>
-            <a:r>
-              <a:rPr lang="en-US" sz="900" dirty="0">
-                <a:solidFill>
-                  <a:srgbClr val="615C52"/>
+          <a:bodyPr wrap="square" lIns="0" tIns="0" rIns="0" bIns="0" rtlCol="0" anchor="ctr"/>
+          <a:lstStyle/>
+          <a:p>
+            <a:pPr marL="0" indent="0">
+              <a:buNone/>
+            </a:pPr>
+            <a:r>
+              <a:rPr lang="en-US" sz="1450" b="1" dirty="0">
+                <a:solidFill>
+                  <a:srgbClr val="141413"/>
                 </a:solidFill>
                 <a:latin typeface="Inter" pitchFamily="34" charset="0"/>
                 <a:ea typeface="Inter" pitchFamily="34" charset="-122"/>
                 <a:cs typeface="Inter" pitchFamily="34" charset="-120"/>
               </a:rPr>
-              <a:t>dotnetclaude.com</a:t>
-            </a:r>
-            <a:endParaRPr lang="en-US" sz="900" dirty="0"/>
-          </a:p>
-        </p:txBody>
-      </p:sp>
-      <p:sp>
-        <p:nvSpPr>
-          <p:cNvPr id="21" name="Text 15"/>
-          <p:cNvSpPr/>
-          <p:nvPr/>
-        </p:nvSpPr>
-        <p:spPr>
-          <a:xfrm>
-            <a:off x="4937760" y="4828032"/>
-            <a:ext cx="3657600" cy="274320"/>
+              <a:t>Same .claude/, new work</a:t>
+            </a:r>
+            <a:endParaRPr lang="en-US" sz="1450" dirty="0"/>
+          </a:p>
+        </p:txBody>
+      </p:sp>
+      <p:sp>
+        <p:nvSpPr>
+          <p:cNvPr id="19" name="Text 13"/>
+          <p:cNvSpPr/>
+          <p:nvPr/>
+        </p:nvSpPr>
+        <p:spPr>
+          <a:xfrm>
+            <a:off x="5029200" y="3712464"/>
+            <a:ext cx="3474720" cy="292608"/>
           </a:xfrm>
           <a:prstGeom prst="rect">
             <a:avLst/>
@@ -2910,14 +2432,14 @@
           <a:ln/>
         </p:spPr>
         <p:txBody>
-          <a:bodyPr wrap="square" rtlCol="0" anchor="ctr"/>
-          <a:lstStyle/>
-          <a:p>
-            <a:pPr algn="r" indent="0" marL="0">
-              <a:buNone/>
-            </a:pPr>
-            <a:r>
-              <a:rPr lang="en-US" sz="900" dirty="0">
+          <a:bodyPr wrap="square" lIns="0" tIns="0" rIns="0" bIns="0" rtlCol="0" anchor="ctr"/>
+          <a:lstStyle/>
+          <a:p>
+            <a:pPr marL="0" indent="0">
+              <a:buNone/>
+            </a:pPr>
+            <a:r>
+              <a:rPr lang="en-US" sz="1200" dirty="0">
                 <a:solidFill>
                   <a:srgbClr val="615C52"/>
                 </a:solidFill>
@@ -2925,22 +2447,22 @@
                 <a:ea typeface="Inter" pitchFamily="34" charset="-122"/>
                 <a:cs typeface="Inter" pitchFamily="34" charset="-120"/>
               </a:rPr>
-              <a:t>Day 2  ·  11/11</a:t>
-            </a:r>
-            <a:endParaRPr lang="en-US" sz="900" dirty="0"/>
-          </a:p>
-        </p:txBody>
-      </p:sp>
-      <p:sp>
-        <p:nvSpPr>
-          <p:cNvPr id="22" name="Text 16"/>
-          <p:cNvSpPr/>
-          <p:nvPr/>
-        </p:nvSpPr>
-        <p:spPr>
-          <a:xfrm>
-            <a:off x="548640" y="4462272"/>
-            <a:ext cx="8046720" cy="274320"/>
+              <a:t>Steering you built once keeps paying off</a:t>
+            </a:r>
+            <a:endParaRPr lang="en-US" sz="1200" dirty="0"/>
+          </a:p>
+        </p:txBody>
+      </p:sp>
+      <p:sp>
+        <p:nvSpPr>
+          <p:cNvPr id="20" name="Text 14"/>
+          <p:cNvSpPr/>
+          <p:nvPr/>
+        </p:nvSpPr>
+        <p:spPr>
+          <a:xfrm>
+            <a:off x="548640" y="4828032"/>
+            <a:ext cx="3657600" cy="274320"/>
           </a:xfrm>
           <a:prstGeom prst="rect">
             <a:avLst/>
@@ -2949,14 +2471,14 @@
           <a:ln/>
         </p:spPr>
         <p:txBody>
-          <a:bodyPr wrap="square" lIns="0" tIns="0" rIns="0" bIns="0" rtlCol="0" anchor="ctr"/>
-          <a:lstStyle/>
-          <a:p>
-            <a:pPr indent="0" marL="0">
-              <a:buNone/>
-            </a:pPr>
-            <a:r>
-              <a:rPr lang="en-US" sz="1000" i="1" dirty="0">
+          <a:bodyPr wrap="square" rtlCol="0" anchor="ctr"/>
+          <a:lstStyle/>
+          <a:p>
+            <a:pPr marL="0" indent="0">
+              <a:buNone/>
+            </a:pPr>
+            <a:r>
+              <a:rPr lang="en-US" sz="900" dirty="0">
                 <a:solidFill>
                   <a:srgbClr val="615C52"/>
                 </a:solidFill>
@@ -2964,9 +2486,48 @@
                 <a:ea typeface="Inter" pitchFamily="34" charset="-122"/>
                 <a:cs typeface="Inter" pitchFamily="34" charset="-120"/>
               </a:rPr>
-              <a:t>▸ Don't rebuild steering — Day 1's .claude/ already accelerates today's work.</a:t>
-            </a:r>
-            <a:endParaRPr lang="en-US" sz="1000" dirty="0"/>
+              <a:t>dotnetclaude.com</a:t>
+            </a:r>
+            <a:endParaRPr lang="en-US" sz="900" dirty="0"/>
+          </a:p>
+        </p:txBody>
+      </p:sp>
+      <p:sp>
+        <p:nvSpPr>
+          <p:cNvPr id="21" name="Text 15"/>
+          <p:cNvSpPr/>
+          <p:nvPr/>
+        </p:nvSpPr>
+        <p:spPr>
+          <a:xfrm>
+            <a:off x="4937760" y="4828032"/>
+            <a:ext cx="3657600" cy="274320"/>
+          </a:xfrm>
+          <a:prstGeom prst="rect">
+            <a:avLst/>
+          </a:prstGeom>
+          <a:noFill/>
+          <a:ln/>
+        </p:spPr>
+        <p:txBody>
+          <a:bodyPr wrap="square" rtlCol="0" anchor="ctr"/>
+          <a:lstStyle/>
+          <a:p>
+            <a:pPr marL="0" indent="0" algn="r">
+              <a:buNone/>
+            </a:pPr>
+            <a:r>
+              <a:rPr lang="en-US" sz="900" dirty="0">
+                <a:solidFill>
+                  <a:srgbClr val="615C52"/>
+                </a:solidFill>
+                <a:latin typeface="Inter" pitchFamily="34" charset="0"/>
+                <a:ea typeface="Inter" pitchFamily="34" charset="-122"/>
+                <a:cs typeface="Inter" pitchFamily="34" charset="-120"/>
+              </a:rPr>
+              <a:t>Day 2  ·  11/11</a:t>
+            </a:r>
+            <a:endParaRPr lang="en-US" sz="900" dirty="0"/>
           </a:p>
         </p:txBody>
       </p:sp>
@@ -2986,6 +2547,7 @@
         <a:solidFill>
           <a:srgbClr val="F0EEE6"/>
         </a:solidFill>
+        <a:effectLst/>
       </p:bgPr>
     </p:bg>
     <p:spTree>
@@ -3023,11 +2585,11 @@
           <a:bodyPr wrap="square" lIns="0" tIns="0" rIns="0" bIns="0" rtlCol="0" anchor="ctr"/>
           <a:lstStyle/>
           <a:p>
-            <a:pPr indent="0" marL="0">
-              <a:buNone/>
-            </a:pPr>
-            <a:r>
-              <a:rPr lang="en-US" sz="1100" b="1" spc="200" kern="0" dirty="0">
+            <a:pPr marL="0" indent="0">
+              <a:buNone/>
+            </a:pPr>
+            <a:r>
+              <a:rPr lang="en-US" sz="1100" b="1" kern="0" spc="200" dirty="0">
                 <a:solidFill>
                   <a:srgbClr val="C25E40"/>
                 </a:solidFill>
@@ -3062,7 +2624,7 @@
           <a:bodyPr wrap="square" lIns="0" tIns="0" rIns="0" bIns="0" rtlCol="0" anchor="ctr"/>
           <a:lstStyle/>
           <a:p>
-            <a:pPr indent="0" marL="0">
+            <a:pPr marL="0" indent="0">
               <a:buNone/>
             </a:pPr>
             <a:r>
@@ -3099,17 +2661,24 @@
           </a:solidFill>
           <a:ln/>
         </p:spPr>
+        <p:txBody>
+          <a:bodyPr/>
+          <a:lstStyle/>
+          <a:p>
+            <a:endParaRPr lang="en-US"/>
+          </a:p>
+        </p:txBody>
       </p:sp>
       <p:pic>
         <p:nvPicPr>
-          <p:cNvPr id="5" name="Image 0" descr="preencoded.png">    </p:cNvPr>
+          <p:cNvPr id="5" name="Image 0" descr="preencoded.png"/>
           <p:cNvPicPr>
             <a:picLocks noChangeAspect="1"/>
           </p:cNvPicPr>
           <p:nvPr/>
         </p:nvPicPr>
         <p:blipFill>
-          <a:blip r:embed="rId1"/>
+          <a:blip r:embed="rId2"/>
           <a:stretch>
             <a:fillRect/>
           </a:stretch>
@@ -3145,7 +2714,7 @@
           <a:bodyPr wrap="square" lIns="0" tIns="0" rIns="0" bIns="0" rtlCol="0" anchor="t"/>
           <a:lstStyle/>
           <a:p>
-            <a:pPr indent="0" marL="0">
+            <a:pPr marL="0" indent="0">
               <a:buNone/>
             </a:pPr>
             <a:r>
@@ -3159,9 +2728,6 @@
               </a:rPr>
               <a:t>Architect, implement, and deploy </a:t>
             </a:r>
-            <a:pPr indent="0" marL="0">
-              <a:buNone/>
-            </a:pPr>
             <a:r>
               <a:rPr lang="en-US" sz="2800" b="1" dirty="0">
                 <a:solidFill>
@@ -3198,7 +2764,7 @@
           <a:bodyPr wrap="square" lIns="0" tIns="0" rIns="0" bIns="0" rtlCol="0" anchor="ctr"/>
           <a:lstStyle/>
           <a:p>
-            <a:pPr indent="0" marL="0">
+            <a:pPr marL="0" indent="0">
               <a:buNone/>
             </a:pPr>
             <a:r>
@@ -3237,7 +2803,7 @@
           <a:bodyPr wrap="square" lIns="0" tIns="0" rIns="0" bIns="0" rtlCol="0" anchor="ctr"/>
           <a:lstStyle/>
           <a:p>
-            <a:pPr indent="0" marL="0">
+            <a:pPr marL="0" indent="0">
               <a:buNone/>
             </a:pPr>
             <a:r>
@@ -3276,7 +2842,7 @@
           <a:bodyPr wrap="square" rtlCol="0" anchor="ctr"/>
           <a:lstStyle/>
           <a:p>
-            <a:pPr indent="0" marL="0">
+            <a:pPr marL="0" indent="0">
               <a:buNone/>
             </a:pPr>
             <a:r>
@@ -3315,7 +2881,7 @@
           <a:bodyPr wrap="square" rtlCol="0" anchor="ctr"/>
           <a:lstStyle/>
           <a:p>
-            <a:pPr algn="r" indent="0" marL="0">
+            <a:pPr marL="0" indent="0" algn="r">
               <a:buNone/>
             </a:pPr>
             <a:r>
@@ -3330,45 +2896,6 @@
               <a:t>Day 2  ·  2/11</a:t>
             </a:r>
             <a:endParaRPr lang="en-US" sz="900" dirty="0"/>
-          </a:p>
-        </p:txBody>
-      </p:sp>
-      <p:sp>
-        <p:nvSpPr>
-          <p:cNvPr id="11" name="Text 8"/>
-          <p:cNvSpPr/>
-          <p:nvPr/>
-        </p:nvSpPr>
-        <p:spPr>
-          <a:xfrm>
-            <a:off x="548640" y="4462272"/>
-            <a:ext cx="8046720" cy="274320"/>
-          </a:xfrm>
-          <a:prstGeom prst="rect">
-            <a:avLst/>
-          </a:prstGeom>
-          <a:noFill/>
-          <a:ln/>
-        </p:spPr>
-        <p:txBody>
-          <a:bodyPr wrap="square" lIns="0" tIns="0" rIns="0" bIns="0" rtlCol="0" anchor="ctr"/>
-          <a:lstStyle/>
-          <a:p>
-            <a:pPr indent="0" marL="0">
-              <a:buNone/>
-            </a:pPr>
-            <a:r>
-              <a:rPr lang="en-US" sz="1000" i="1" dirty="0">
-                <a:solidFill>
-                  <a:srgbClr val="615C52"/>
-                </a:solidFill>
-                <a:latin typeface="Inter" pitchFamily="34" charset="0"/>
-                <a:ea typeface="Inter" pitchFamily="34" charset="-122"/>
-                <a:cs typeface="Inter" pitchFamily="34" charset="-120"/>
-              </a:rPr>
-              <a:t>▸ Frame the bar: production C#, not demos — everything wires into BookTracker.</a:t>
-            </a:r>
-            <a:endParaRPr lang="en-US" sz="1000" dirty="0"/>
           </a:p>
         </p:txBody>
       </p:sp>
@@ -3388,6 +2915,7 @@
         <a:solidFill>
           <a:srgbClr val="F0EEE6"/>
         </a:solidFill>
+        <a:effectLst/>
       </p:bgPr>
     </p:bg>
     <p:spTree>
@@ -3425,11 +2953,11 @@
           <a:bodyPr wrap="square" lIns="0" tIns="0" rIns="0" bIns="0" rtlCol="0" anchor="ctr"/>
           <a:lstStyle/>
           <a:p>
-            <a:pPr indent="0" marL="0">
-              <a:buNone/>
-            </a:pPr>
-            <a:r>
-              <a:rPr lang="en-US" sz="1100" b="1" spc="200" kern="0" dirty="0">
+            <a:pPr marL="0" indent="0">
+              <a:buNone/>
+            </a:pPr>
+            <a:r>
+              <a:rPr lang="en-US" sz="1100" b="1" kern="0" spc="200" dirty="0">
                 <a:solidFill>
                   <a:srgbClr val="C25E40"/>
                 </a:solidFill>
@@ -3464,7 +2992,7 @@
           <a:bodyPr wrap="square" lIns="0" tIns="0" rIns="0" bIns="0" rtlCol="0" anchor="ctr"/>
           <a:lstStyle/>
           <a:p>
-            <a:pPr indent="0" marL="0">
+            <a:pPr marL="0" indent="0">
               <a:buNone/>
             </a:pPr>
             <a:r>
@@ -3498,16 +3026,34 @@
         </p:nvGraphicFramePr>
         <p:xfrm>
           <a:off x="548640" y="1371600"/>
-          <a:ext cx="8046720" cy="914400"/>
+          <a:ext cx="8046720" cy="2798064"/>
         </p:xfrm>
         <a:graphic>
           <a:graphicData uri="http://schemas.openxmlformats.org/drawingml/2006/table">
             <a:tbl>
               <a:tblPr/>
               <a:tblGrid>
-                <a:gridCol w="1554480"/>
-                <a:gridCol w="4297680"/>
-                <a:gridCol w="2194560"/>
+                <a:gridCol w="1554480">
+                  <a:extLst>
+                    <a:ext uri="{9D8B030D-6E8A-4147-A177-3AD203B41FA5}">
+                      <a16:colId xmlns:a16="http://schemas.microsoft.com/office/drawing/2014/main" val="20000"/>
+                    </a:ext>
+                  </a:extLst>
+                </a:gridCol>
+                <a:gridCol w="4297680">
+                  <a:extLst>
+                    <a:ext uri="{9D8B030D-6E8A-4147-A177-3AD203B41FA5}">
+                      <a16:colId xmlns:a16="http://schemas.microsoft.com/office/drawing/2014/main" val="20001"/>
+                    </a:ext>
+                  </a:extLst>
+                </a:gridCol>
+                <a:gridCol w="2194560">
+                  <a:extLst>
+                    <a:ext uri="{9D8B030D-6E8A-4147-A177-3AD203B41FA5}">
+                      <a16:colId xmlns:a16="http://schemas.microsoft.com/office/drawing/2014/main" val="20002"/>
+                    </a:ext>
+                  </a:extLst>
+                </a:gridCol>
               </a:tblGrid>
               <a:tr h="329184">
                 <a:tc>
@@ -3515,7 +3061,7 @@
                     <a:bodyPr/>
                     <a:lstStyle/>
                     <a:p>
-                      <a:pPr algn="l" indent="0" marL="0">
+                      <a:pPr marL="0" indent="0" algn="l">
                         <a:buNone/>
                       </a:pPr>
                       <a:r>
@@ -3583,7 +3129,7 @@
                     <a:bodyPr/>
                     <a:lstStyle/>
                     <a:p>
-                      <a:pPr algn="l" indent="0" marL="0">
+                      <a:pPr marL="0" indent="0" algn="l">
                         <a:buNone/>
                       </a:pPr>
                       <a:r>
@@ -3651,7 +3197,7 @@
                     <a:bodyPr/>
                     <a:lstStyle/>
                     <a:p>
-                      <a:pPr algn="l" indent="0" marL="0">
+                      <a:pPr marL="0" indent="0" algn="l">
                         <a:buNone/>
                       </a:pPr>
                       <a:r>
@@ -3714,6 +3260,11 @@
                     </a:solidFill>
                   </a:tcPr>
                 </a:tc>
+                <a:extLst>
+                  <a:ext uri="{0D108BD9-81ED-4DB2-BD59-A6C34878D82A}">
+                    <a16:rowId xmlns:a16="http://schemas.microsoft.com/office/drawing/2014/main" val="10000"/>
+                  </a:ext>
+                </a:extLst>
               </a:tr>
               <a:tr h="365760">
                 <a:tc>
@@ -3721,7 +3272,7 @@
                     <a:bodyPr/>
                     <a:lstStyle/>
                     <a:p>
-                      <a:pPr algn="l" indent="0" marL="0">
+                      <a:pPr marL="0" indent="0" algn="l">
                         <a:buNone/>
                       </a:pPr>
                       <a:r>
@@ -3789,7 +3340,7 @@
                     <a:bodyPr/>
                     <a:lstStyle/>
                     <a:p>
-                      <a:pPr algn="l" indent="0" marL="0">
+                      <a:pPr marL="0" indent="0" algn="l">
                         <a:buNone/>
                       </a:pPr>
                       <a:r>
@@ -3857,7 +3408,7 @@
                     <a:bodyPr/>
                     <a:lstStyle/>
                     <a:p>
-                      <a:pPr algn="l" indent="0" marL="0">
+                      <a:pPr marL="0" indent="0" algn="l">
                         <a:buNone/>
                       </a:pPr>
                       <a:r>
@@ -3920,6 +3471,11 @@
                     </a:solidFill>
                   </a:tcPr>
                 </a:tc>
+                <a:extLst>
+                  <a:ext uri="{0D108BD9-81ED-4DB2-BD59-A6C34878D82A}">
+                    <a16:rowId xmlns:a16="http://schemas.microsoft.com/office/drawing/2014/main" val="10001"/>
+                  </a:ext>
+                </a:extLst>
               </a:tr>
               <a:tr h="365760">
                 <a:tc>
@@ -3927,7 +3483,7 @@
                     <a:bodyPr/>
                     <a:lstStyle/>
                     <a:p>
-                      <a:pPr algn="l" indent="0" marL="0">
+                      <a:pPr marL="0" indent="0" algn="l">
                         <a:buNone/>
                       </a:pPr>
                       <a:r>
@@ -3995,7 +3551,7 @@
                     <a:bodyPr/>
                     <a:lstStyle/>
                     <a:p>
-                      <a:pPr algn="l" indent="0" marL="0">
+                      <a:pPr marL="0" indent="0" algn="l">
                         <a:buNone/>
                       </a:pPr>
                       <a:r>
@@ -4063,7 +3619,7 @@
                     <a:bodyPr/>
                     <a:lstStyle/>
                     <a:p>
-                      <a:pPr algn="l" indent="0" marL="0">
+                      <a:pPr marL="0" indent="0" algn="l">
                         <a:buNone/>
                       </a:pPr>
                       <a:r>
@@ -4126,6 +3682,11 @@
                     </a:solidFill>
                   </a:tcPr>
                 </a:tc>
+                <a:extLst>
+                  <a:ext uri="{0D108BD9-81ED-4DB2-BD59-A6C34878D82A}">
+                    <a16:rowId xmlns:a16="http://schemas.microsoft.com/office/drawing/2014/main" val="10002"/>
+                  </a:ext>
+                </a:extLst>
               </a:tr>
               <a:tr h="274320">
                 <a:tc>
@@ -4133,7 +3694,7 @@
                     <a:bodyPr/>
                     <a:lstStyle/>
                     <a:p>
-                      <a:pPr algn="l" indent="0" marL="0">
+                      <a:pPr marL="0" indent="0" algn="l">
                         <a:buNone/>
                       </a:pPr>
                       <a:r>
@@ -4201,7 +3762,7 @@
                     <a:bodyPr/>
                     <a:lstStyle/>
                     <a:p>
-                      <a:pPr algn="l" indent="0" marL="0">
+                      <a:pPr marL="0" indent="0" algn="l">
                         <a:buNone/>
                       </a:pPr>
                       <a:r>
@@ -4269,7 +3830,7 @@
                     <a:bodyPr/>
                     <a:lstStyle/>
                     <a:p>
-                      <a:pPr algn="l" indent="0" marL="0">
+                      <a:pPr marL="0" indent="0" algn="l">
                         <a:buNone/>
                       </a:pPr>
                       <a:r>
@@ -4332,6 +3893,11 @@
                     </a:solidFill>
                   </a:tcPr>
                 </a:tc>
+                <a:extLst>
+                  <a:ext uri="{0D108BD9-81ED-4DB2-BD59-A6C34878D82A}">
+                    <a16:rowId xmlns:a16="http://schemas.microsoft.com/office/drawing/2014/main" val="10003"/>
+                  </a:ext>
+                </a:extLst>
               </a:tr>
               <a:tr h="365760">
                 <a:tc>
@@ -4339,7 +3905,7 @@
                     <a:bodyPr/>
                     <a:lstStyle/>
                     <a:p>
-                      <a:pPr algn="l" indent="0" marL="0">
+                      <a:pPr marL="0" indent="0" algn="l">
                         <a:buNone/>
                       </a:pPr>
                       <a:r>
@@ -4407,7 +3973,7 @@
                     <a:bodyPr/>
                     <a:lstStyle/>
                     <a:p>
-                      <a:pPr algn="l" indent="0" marL="0">
+                      <a:pPr marL="0" indent="0" algn="l">
                         <a:buNone/>
                       </a:pPr>
                       <a:r>
@@ -4475,7 +4041,7 @@
                     <a:bodyPr/>
                     <a:lstStyle/>
                     <a:p>
-                      <a:pPr algn="l" indent="0" marL="0">
+                      <a:pPr marL="0" indent="0" algn="l">
                         <a:buNone/>
                       </a:pPr>
                       <a:r>
@@ -4538,6 +4104,11 @@
                     </a:solidFill>
                   </a:tcPr>
                 </a:tc>
+                <a:extLst>
+                  <a:ext uri="{0D108BD9-81ED-4DB2-BD59-A6C34878D82A}">
+                    <a16:rowId xmlns:a16="http://schemas.microsoft.com/office/drawing/2014/main" val="10004"/>
+                  </a:ext>
+                </a:extLst>
               </a:tr>
               <a:tr h="365760">
                 <a:tc>
@@ -4545,7 +4116,7 @@
                     <a:bodyPr/>
                     <a:lstStyle/>
                     <a:p>
-                      <a:pPr algn="l" indent="0" marL="0">
+                      <a:pPr marL="0" indent="0" algn="l">
                         <a:buNone/>
                       </a:pPr>
                       <a:r>
@@ -4613,7 +4184,7 @@
                     <a:bodyPr/>
                     <a:lstStyle/>
                     <a:p>
-                      <a:pPr algn="l" indent="0" marL="0">
+                      <a:pPr marL="0" indent="0" algn="l">
                         <a:buNone/>
                       </a:pPr>
                       <a:r>
@@ -4681,7 +4252,7 @@
                     <a:bodyPr/>
                     <a:lstStyle/>
                     <a:p>
-                      <a:pPr algn="l" indent="0" marL="0">
+                      <a:pPr marL="0" indent="0" algn="l">
                         <a:buNone/>
                       </a:pPr>
                       <a:r>
@@ -4744,6 +4315,11 @@
                     </a:solidFill>
                   </a:tcPr>
                 </a:tc>
+                <a:extLst>
+                  <a:ext uri="{0D108BD9-81ED-4DB2-BD59-A6C34878D82A}">
+                    <a16:rowId xmlns:a16="http://schemas.microsoft.com/office/drawing/2014/main" val="10005"/>
+                  </a:ext>
+                </a:extLst>
               </a:tr>
               <a:tr h="365760">
                 <a:tc>
@@ -4751,7 +4327,7 @@
                     <a:bodyPr/>
                     <a:lstStyle/>
                     <a:p>
-                      <a:pPr algn="l" indent="0" marL="0">
+                      <a:pPr marL="0" indent="0" algn="l">
                         <a:buNone/>
                       </a:pPr>
                       <a:r>
@@ -4819,7 +4395,7 @@
                     <a:bodyPr/>
                     <a:lstStyle/>
                     <a:p>
-                      <a:pPr algn="l" indent="0" marL="0">
+                      <a:pPr marL="0" indent="0" algn="l">
                         <a:buNone/>
                       </a:pPr>
                       <a:r>
@@ -4887,7 +4463,7 @@
                     <a:bodyPr/>
                     <a:lstStyle/>
                     <a:p>
-                      <a:pPr algn="l" indent="0" marL="0">
+                      <a:pPr marL="0" indent="0" algn="l">
                         <a:buNone/>
                       </a:pPr>
                       <a:r>
@@ -4950,6 +4526,11 @@
                     </a:solidFill>
                   </a:tcPr>
                 </a:tc>
+                <a:extLst>
+                  <a:ext uri="{0D108BD9-81ED-4DB2-BD59-A6C34878D82A}">
+                    <a16:rowId xmlns:a16="http://schemas.microsoft.com/office/drawing/2014/main" val="10006"/>
+                  </a:ext>
+                </a:extLst>
               </a:tr>
               <a:tr h="365760">
                 <a:tc>
@@ -4957,7 +4538,7 @@
                     <a:bodyPr/>
                     <a:lstStyle/>
                     <a:p>
-                      <a:pPr algn="l" indent="0" marL="0">
+                      <a:pPr marL="0" indent="0" algn="l">
                         <a:buNone/>
                       </a:pPr>
                       <a:r>
@@ -5025,7 +4606,7 @@
                     <a:bodyPr/>
                     <a:lstStyle/>
                     <a:p>
-                      <a:pPr algn="l" indent="0" marL="0">
+                      <a:pPr marL="0" indent="0" algn="l">
                         <a:buNone/>
                       </a:pPr>
                       <a:r>
@@ -5093,7 +4674,7 @@
                     <a:bodyPr/>
                     <a:lstStyle/>
                     <a:p>
-                      <a:pPr algn="l" indent="0" marL="0">
+                      <a:pPr marL="0" indent="0" algn="l">
                         <a:buNone/>
                       </a:pPr>
                       <a:r>
@@ -5156,6 +4737,11 @@
                     </a:solidFill>
                   </a:tcPr>
                 </a:tc>
+                <a:extLst>
+                  <a:ext uri="{0D108BD9-81ED-4DB2-BD59-A6C34878D82A}">
+                    <a16:rowId xmlns:a16="http://schemas.microsoft.com/office/drawing/2014/main" val="10007"/>
+                  </a:ext>
+                </a:extLst>
               </a:tr>
             </a:tbl>
           </a:graphicData>
@@ -5182,7 +4768,7 @@
           <a:bodyPr wrap="square" rtlCol="0" anchor="ctr"/>
           <a:lstStyle/>
           <a:p>
-            <a:pPr indent="0" marL="0">
+            <a:pPr marL="0" indent="0">
               <a:buNone/>
             </a:pPr>
             <a:r>
@@ -5221,7 +4807,7 @@
           <a:bodyPr wrap="square" rtlCol="0" anchor="ctr"/>
           <a:lstStyle/>
           <a:p>
-            <a:pPr algn="r" indent="0" marL="0">
+            <a:pPr marL="0" indent="0" algn="r">
               <a:buNone/>
             </a:pPr>
             <a:r>
@@ -5236,45 +4822,6 @@
               <a:t>Day 2  ·  3/11</a:t>
             </a:r>
             <a:endParaRPr lang="en-US" sz="900" dirty="0"/>
-          </a:p>
-        </p:txBody>
-      </p:sp>
-      <p:sp>
-        <p:nvSpPr>
-          <p:cNvPr id="7" name="Text 4"/>
-          <p:cNvSpPr/>
-          <p:nvPr/>
-        </p:nvSpPr>
-        <p:spPr>
-          <a:xfrm>
-            <a:off x="548640" y="4462272"/>
-            <a:ext cx="8046720" cy="274320"/>
-          </a:xfrm>
-          <a:prstGeom prst="rect">
-            <a:avLst/>
-          </a:prstGeom>
-          <a:noFill/>
-          <a:ln/>
-        </p:spPr>
-        <p:txBody>
-          <a:bodyPr wrap="square" lIns="0" tIns="0" rIns="0" bIns="0" rtlCol="0" anchor="ctr"/>
-          <a:lstStyle/>
-          <a:p>
-            <a:pPr indent="0" marL="0">
-              <a:buNone/>
-            </a:pPr>
-            <a:r>
-              <a:rPr lang="en-US" sz="1000" i="1" dirty="0">
-                <a:solidFill>
-                  <a:srgbClr val="615C52"/>
-                </a:solidFill>
-                <a:latin typeface="Inter" pitchFamily="34" charset="0"/>
-                <a:ea typeface="Inter" pitchFamily="34" charset="-122"/>
-                <a:cs typeface="Inter" pitchFamily="34" charset="-120"/>
-              </a:rPr>
-              <a:t>▸ Six sessions building on each other — SDK first, deployment and ethics last.</a:t>
-            </a:r>
-            <a:endParaRPr lang="en-US" sz="1000" dirty="0"/>
           </a:p>
         </p:txBody>
       </p:sp>
@@ -5294,6 +4841,7 @@
         <a:solidFill>
           <a:srgbClr val="F0EEE6"/>
         </a:solidFill>
+        <a:effectLst/>
       </p:bgPr>
     </p:bg>
     <p:spTree>
@@ -5331,11 +4879,11 @@
           <a:bodyPr wrap="square" lIns="0" tIns="0" rIns="0" bIns="0" rtlCol="0" anchor="ctr"/>
           <a:lstStyle/>
           <a:p>
-            <a:pPr indent="0" marL="0">
-              <a:buNone/>
-            </a:pPr>
-            <a:r>
-              <a:rPr lang="en-US" sz="1100" b="1" spc="200" kern="0" dirty="0">
+            <a:pPr marL="0" indent="0">
+              <a:buNone/>
+            </a:pPr>
+            <a:r>
+              <a:rPr lang="en-US" sz="1100" b="1" kern="0" spc="200" dirty="0">
                 <a:solidFill>
                   <a:srgbClr val="C25E40"/>
                 </a:solidFill>
@@ -5370,7 +4918,7 @@
           <a:bodyPr wrap="square" lIns="0" tIns="0" rIns="0" bIns="0" rtlCol="0" anchor="ctr"/>
           <a:lstStyle/>
           <a:p>
-            <a:pPr indent="0" marL="0">
+            <a:pPr marL="0" indent="0">
               <a:buNone/>
             </a:pPr>
             <a:r>
@@ -5404,15 +4952,27 @@
         </p:nvGraphicFramePr>
         <p:xfrm>
           <a:off x="548640" y="1371600"/>
-          <a:ext cx="8046720" cy="914400"/>
+          <a:ext cx="8046720" cy="3054096"/>
         </p:xfrm>
         <a:graphic>
           <a:graphicData uri="http://schemas.openxmlformats.org/drawingml/2006/table">
             <a:tbl>
               <a:tblPr/>
               <a:tblGrid>
-                <a:gridCol w="6675120"/>
-                <a:gridCol w="1371600"/>
+                <a:gridCol w="6675120">
+                  <a:extLst>
+                    <a:ext uri="{9D8B030D-6E8A-4147-A177-3AD203B41FA5}">
+                      <a16:colId xmlns:a16="http://schemas.microsoft.com/office/drawing/2014/main" val="20000"/>
+                    </a:ext>
+                  </a:extLst>
+                </a:gridCol>
+                <a:gridCol w="1371600">
+                  <a:extLst>
+                    <a:ext uri="{9D8B030D-6E8A-4147-A177-3AD203B41FA5}">
+                      <a16:colId xmlns:a16="http://schemas.microsoft.com/office/drawing/2014/main" val="20001"/>
+                    </a:ext>
+                  </a:extLst>
+                </a:gridCol>
               </a:tblGrid>
               <a:tr h="365760">
                 <a:tc>
@@ -5420,7 +4980,7 @@
                     <a:bodyPr/>
                     <a:lstStyle/>
                     <a:p>
-                      <a:pPr indent="0" marL="0">
+                      <a:pPr marL="0" indent="0">
                         <a:buNone/>
                       </a:pPr>
                       <a:r>
@@ -5488,7 +5048,7 @@
                     <a:bodyPr/>
                     <a:lstStyle/>
                     <a:p>
-                      <a:pPr indent="0" marL="0">
+                      <a:pPr marL="0" indent="0">
                         <a:buNone/>
                       </a:pPr>
                       <a:r>
@@ -5551,6 +5111,11 @@
                     </a:solidFill>
                   </a:tcPr>
                 </a:tc>
+                <a:extLst>
+                  <a:ext uri="{0D108BD9-81ED-4DB2-BD59-A6C34878D82A}">
+                    <a16:rowId xmlns:a16="http://schemas.microsoft.com/office/drawing/2014/main" val="10000"/>
+                  </a:ext>
+                </a:extLst>
               </a:tr>
               <a:tr h="384048">
                 <a:tc>
@@ -5558,7 +5123,7 @@
                     <a:bodyPr/>
                     <a:lstStyle/>
                     <a:p>
-                      <a:pPr indent="0" marL="0">
+                      <a:pPr marL="0" indent="0">
                         <a:buNone/>
                       </a:pPr>
                       <a:r>
@@ -5626,7 +5191,7 @@
                     <a:bodyPr/>
                     <a:lstStyle/>
                     <a:p>
-                      <a:pPr algn="ctr" indent="0" marL="0">
+                      <a:pPr marL="0" indent="0" algn="ctr">
                         <a:buNone/>
                       </a:pPr>
                       <a:r>
@@ -5689,6 +5254,11 @@
                     </a:solidFill>
                   </a:tcPr>
                 </a:tc>
+                <a:extLst>
+                  <a:ext uri="{0D108BD9-81ED-4DB2-BD59-A6C34878D82A}">
+                    <a16:rowId xmlns:a16="http://schemas.microsoft.com/office/drawing/2014/main" val="10001"/>
+                  </a:ext>
+                </a:extLst>
               </a:tr>
               <a:tr h="384048">
                 <a:tc>
@@ -5696,7 +5266,7 @@
                     <a:bodyPr/>
                     <a:lstStyle/>
                     <a:p>
-                      <a:pPr indent="0" marL="0">
+                      <a:pPr marL="0" indent="0">
                         <a:buNone/>
                       </a:pPr>
                       <a:r>
@@ -5764,7 +5334,7 @@
                     <a:bodyPr/>
                     <a:lstStyle/>
                     <a:p>
-                      <a:pPr algn="ctr" indent="0" marL="0">
+                      <a:pPr marL="0" indent="0" algn="ctr">
                         <a:buNone/>
                       </a:pPr>
                       <a:r>
@@ -5827,6 +5397,11 @@
                     </a:solidFill>
                   </a:tcPr>
                 </a:tc>
+                <a:extLst>
+                  <a:ext uri="{0D108BD9-81ED-4DB2-BD59-A6C34878D82A}">
+                    <a16:rowId xmlns:a16="http://schemas.microsoft.com/office/drawing/2014/main" val="10002"/>
+                  </a:ext>
+                </a:extLst>
               </a:tr>
               <a:tr h="384048">
                 <a:tc>
@@ -5834,7 +5409,7 @@
                     <a:bodyPr/>
                     <a:lstStyle/>
                     <a:p>
-                      <a:pPr indent="0" marL="0">
+                      <a:pPr marL="0" indent="0">
                         <a:buNone/>
                       </a:pPr>
                       <a:r>
@@ -5902,7 +5477,7 @@
                     <a:bodyPr/>
                     <a:lstStyle/>
                     <a:p>
-                      <a:pPr algn="ctr" indent="0" marL="0">
+                      <a:pPr marL="0" indent="0" algn="ctr">
                         <a:buNone/>
                       </a:pPr>
                       <a:r>
@@ -5965,6 +5540,11 @@
                     </a:solidFill>
                   </a:tcPr>
                 </a:tc>
+                <a:extLst>
+                  <a:ext uri="{0D108BD9-81ED-4DB2-BD59-A6C34878D82A}">
+                    <a16:rowId xmlns:a16="http://schemas.microsoft.com/office/drawing/2014/main" val="10003"/>
+                  </a:ext>
+                </a:extLst>
               </a:tr>
               <a:tr h="384048">
                 <a:tc>
@@ -5972,7 +5552,7 @@
                     <a:bodyPr/>
                     <a:lstStyle/>
                     <a:p>
-                      <a:pPr indent="0" marL="0">
+                      <a:pPr marL="0" indent="0">
                         <a:buNone/>
                       </a:pPr>
                       <a:r>
@@ -6040,7 +5620,7 @@
                     <a:bodyPr/>
                     <a:lstStyle/>
                     <a:p>
-                      <a:pPr algn="ctr" indent="0" marL="0">
+                      <a:pPr marL="0" indent="0" algn="ctr">
                         <a:buNone/>
                       </a:pPr>
                       <a:r>
@@ -6103,6 +5683,11 @@
                     </a:solidFill>
                   </a:tcPr>
                 </a:tc>
+                <a:extLst>
+                  <a:ext uri="{0D108BD9-81ED-4DB2-BD59-A6C34878D82A}">
+                    <a16:rowId xmlns:a16="http://schemas.microsoft.com/office/drawing/2014/main" val="10004"/>
+                  </a:ext>
+                </a:extLst>
               </a:tr>
               <a:tr h="384048">
                 <a:tc>
@@ -6110,7 +5695,7 @@
                     <a:bodyPr/>
                     <a:lstStyle/>
                     <a:p>
-                      <a:pPr indent="0" marL="0">
+                      <a:pPr marL="0" indent="0">
                         <a:buNone/>
                       </a:pPr>
                       <a:r>
@@ -6178,7 +5763,7 @@
                     <a:bodyPr/>
                     <a:lstStyle/>
                     <a:p>
-                      <a:pPr algn="ctr" indent="0" marL="0">
+                      <a:pPr marL="0" indent="0" algn="ctr">
                         <a:buNone/>
                       </a:pPr>
                       <a:r>
@@ -6241,6 +5826,11 @@
                     </a:solidFill>
                   </a:tcPr>
                 </a:tc>
+                <a:extLst>
+                  <a:ext uri="{0D108BD9-81ED-4DB2-BD59-A6C34878D82A}">
+                    <a16:rowId xmlns:a16="http://schemas.microsoft.com/office/drawing/2014/main" val="10005"/>
+                  </a:ext>
+                </a:extLst>
               </a:tr>
               <a:tr h="384048">
                 <a:tc>
@@ -6248,7 +5838,7 @@
                     <a:bodyPr/>
                     <a:lstStyle/>
                     <a:p>
-                      <a:pPr indent="0" marL="0">
+                      <a:pPr marL="0" indent="0">
                         <a:buNone/>
                       </a:pPr>
                       <a:r>
@@ -6316,7 +5906,7 @@
                     <a:bodyPr/>
                     <a:lstStyle/>
                     <a:p>
-                      <a:pPr algn="ctr" indent="0" marL="0">
+                      <a:pPr marL="0" indent="0" algn="ctr">
                         <a:buNone/>
                       </a:pPr>
                       <a:r>
@@ -6379,6 +5969,11 @@
                     </a:solidFill>
                   </a:tcPr>
                 </a:tc>
+                <a:extLst>
+                  <a:ext uri="{0D108BD9-81ED-4DB2-BD59-A6C34878D82A}">
+                    <a16:rowId xmlns:a16="http://schemas.microsoft.com/office/drawing/2014/main" val="10006"/>
+                  </a:ext>
+                </a:extLst>
               </a:tr>
               <a:tr h="384048">
                 <a:tc>
@@ -6386,7 +5981,7 @@
                     <a:bodyPr/>
                     <a:lstStyle/>
                     <a:p>
-                      <a:pPr indent="0" marL="0">
+                      <a:pPr marL="0" indent="0">
                         <a:buNone/>
                       </a:pPr>
                       <a:r>
@@ -6454,7 +6049,7 @@
                     <a:bodyPr/>
                     <a:lstStyle/>
                     <a:p>
-                      <a:pPr algn="ctr" indent="0" marL="0">
+                      <a:pPr marL="0" indent="0" algn="ctr">
                         <a:buNone/>
                       </a:pPr>
                       <a:r>
@@ -6517,6 +6112,11 @@
                     </a:solidFill>
                   </a:tcPr>
                 </a:tc>
+                <a:extLst>
+                  <a:ext uri="{0D108BD9-81ED-4DB2-BD59-A6C34878D82A}">
+                    <a16:rowId xmlns:a16="http://schemas.microsoft.com/office/drawing/2014/main" val="10007"/>
+                  </a:ext>
+                </a:extLst>
               </a:tr>
             </a:tbl>
           </a:graphicData>
@@ -6524,7 +6124,7 @@
       </p:graphicFrame>
       <p:sp>
         <p:nvSpPr>
-          <p:cNvPr id="5" name="Text 2"/>
+          <p:cNvPr id="4" name="Text 2"/>
           <p:cNvSpPr/>
           <p:nvPr/>
         </p:nvSpPr>
@@ -6543,7 +6143,7 @@
           <a:bodyPr wrap="square" rtlCol="0" anchor="ctr"/>
           <a:lstStyle/>
           <a:p>
-            <a:pPr indent="0" marL="0">
+            <a:pPr marL="0" indent="0">
               <a:buNone/>
             </a:pPr>
             <a:r>
@@ -6582,7 +6182,7 @@
           <a:bodyPr wrap="square" rtlCol="0" anchor="ctr"/>
           <a:lstStyle/>
           <a:p>
-            <a:pPr algn="r" indent="0" marL="0">
+            <a:pPr marL="0" indent="0" algn="r">
               <a:buNone/>
             </a:pPr>
             <a:r>
@@ -6597,45 +6197,6 @@
               <a:t>Day 2  ·  4/11</a:t>
             </a:r>
             <a:endParaRPr lang="en-US" sz="900" dirty="0"/>
-          </a:p>
-        </p:txBody>
-      </p:sp>
-      <p:sp>
-        <p:nvSpPr>
-          <p:cNvPr id="7" name="Text 4"/>
-          <p:cNvSpPr/>
-          <p:nvPr/>
-        </p:nvSpPr>
-        <p:spPr>
-          <a:xfrm>
-            <a:off x="548640" y="4462272"/>
-            <a:ext cx="8046720" cy="274320"/>
-          </a:xfrm>
-          <a:prstGeom prst="rect">
-            <a:avLst/>
-          </a:prstGeom>
-          <a:noFill/>
-          <a:ln/>
-        </p:spPr>
-        <p:txBody>
-          <a:bodyPr wrap="square" lIns="0" tIns="0" rIns="0" bIns="0" rtlCol="0" anchor="ctr"/>
-          <a:lstStyle/>
-          <a:p>
-            <a:pPr indent="0" marL="0">
-              <a:buNone/>
-            </a:pPr>
-            <a:r>
-              <a:rPr lang="en-US" sz="1000" i="1" dirty="0">
-                <a:solidFill>
-                  <a:srgbClr val="615C52"/>
-                </a:solidFill>
-                <a:latin typeface="Inter" pitchFamily="34" charset="0"/>
-                <a:ea typeface="Inter" pitchFamily="34" charset="-122"/>
-                <a:cs typeface="Inter" pitchFamily="34" charset="-120"/>
-              </a:rPr>
-              <a:t>▸ Seven outcomes, one per capability — each maps to a session and a lab.</a:t>
-            </a:r>
-            <a:endParaRPr lang="en-US" sz="1000" dirty="0"/>
           </a:p>
         </p:txBody>
       </p:sp>
@@ -6655,6 +6216,7 @@
         <a:solidFill>
           <a:srgbClr val="F0EEE6"/>
         </a:solidFill>
+        <a:effectLst/>
       </p:bgPr>
     </p:bg>
     <p:spTree>
@@ -6692,11 +6254,11 @@
           <a:bodyPr wrap="square" lIns="0" tIns="0" rIns="0" bIns="0" rtlCol="0" anchor="ctr"/>
           <a:lstStyle/>
           <a:p>
-            <a:pPr indent="0" marL="0">
-              <a:buNone/>
-            </a:pPr>
-            <a:r>
-              <a:rPr lang="en-US" sz="1100" b="1" spc="200" kern="0" dirty="0">
+            <a:pPr marL="0" indent="0">
+              <a:buNone/>
+            </a:pPr>
+            <a:r>
+              <a:rPr lang="en-US" sz="1100" b="1" kern="0" spc="200" dirty="0">
                 <a:solidFill>
                   <a:srgbClr val="C25E40"/>
                 </a:solidFill>
@@ -6731,7 +6293,7 @@
           <a:bodyPr wrap="square" lIns="0" tIns="0" rIns="0" bIns="0" rtlCol="0" anchor="ctr"/>
           <a:lstStyle/>
           <a:p>
-            <a:pPr indent="0" marL="0">
+            <a:pPr marL="0" indent="0">
               <a:buNone/>
             </a:pPr>
             <a:r>
@@ -6770,13 +6332,20 @@
           </a:solidFill>
           <a:ln/>
           <a:effectLst>
-            <a:outerShdw sx="100000" sy="100000" kx="0" ky="0" algn="bl" rotWithShape="0" blurRad="88900" dist="38100" dir="5400000">
+            <a:outerShdw blurRad="88900" dist="38100" dir="5400000" algn="bl" rotWithShape="0">
               <a:srgbClr val="000000">
                 <a:alpha val="10000"/>
               </a:srgbClr>
             </a:outerShdw>
           </a:effectLst>
         </p:spPr>
+        <p:txBody>
+          <a:bodyPr/>
+          <a:lstStyle/>
+          <a:p>
+            <a:endParaRPr lang="en-US"/>
+          </a:p>
+        </p:txBody>
       </p:sp>
       <p:sp>
         <p:nvSpPr>
@@ -6797,107 +6366,17 @@
           </a:solidFill>
           <a:ln/>
         </p:spPr>
+        <p:txBody>
+          <a:bodyPr/>
+          <a:lstStyle/>
+          <a:p>
+            <a:endParaRPr lang="en-US"/>
+          </a:p>
+        </p:txBody>
       </p:sp>
       <p:pic>
         <p:nvPicPr>
-          <p:cNvPr id="6" name="Image 0" descr="preencoded.png">    </p:cNvPr>
-          <p:cNvPicPr>
-            <a:picLocks noChangeAspect="1"/>
-          </p:cNvPicPr>
-          <p:nvPr/>
-        </p:nvPicPr>
-        <p:blipFill>
-          <a:blip r:embed="rId1"/>
-          <a:stretch>
-            <a:fillRect/>
-          </a:stretch>
-        </p:blipFill>
-        <p:spPr>
-          <a:xfrm>
-            <a:off x="972007" y="1886407"/>
-            <a:ext cx="241402" cy="241402"/>
-          </a:xfrm>
-          <a:prstGeom prst="rect">
-            <a:avLst/>
-          </a:prstGeom>
-        </p:spPr>
-      </p:pic>
-      <p:sp>
-        <p:nvSpPr>
-          <p:cNvPr id="7" name="Text 4"/>
-          <p:cNvSpPr/>
-          <p:nvPr/>
-        </p:nvSpPr>
-        <p:spPr>
-          <a:xfrm>
-            <a:off x="1572768" y="1417320"/>
-            <a:ext cx="6766560" cy="1097280"/>
-          </a:xfrm>
-          <a:prstGeom prst="rect">
-            <a:avLst/>
-          </a:prstGeom>
-          <a:noFill/>
-          <a:ln/>
-        </p:spPr>
-        <p:txBody>
-          <a:bodyPr wrap="square" lIns="0" tIns="0" rIns="0" bIns="0" rtlCol="0" anchor="ctr"/>
-          <a:lstStyle/>
-          <a:p>
-            <a:pPr indent="0" marL="0">
-              <a:buNone/>
-            </a:pPr>
-            <a:r>
-              <a:rPr lang="en-US" sz="1600" dirty="0">
-                <a:solidFill>
-                  <a:srgbClr val="141413"/>
-                </a:solidFill>
-                <a:latin typeface="Inter" pitchFamily="34" charset="0"/>
-                <a:ea typeface="Inter" pitchFamily="34" charset="-122"/>
-                <a:cs typeface="Inter" pitchFamily="34" charset="-120"/>
-              </a:rPr>
-              <a:t>A Claude.ai Pro / Max subscription powers Claude Code (Day 1) — </a:t>
-            </a:r>
-            <a:pPr indent="0" marL="0">
-              <a:buNone/>
-            </a:pPr>
-            <a:r>
-              <a:rPr lang="en-US" sz="1600" b="1" dirty="0">
-                <a:solidFill>
-                  <a:srgbClr val="C25E40"/>
-                </a:solidFill>
-                <a:latin typeface="Inter" pitchFamily="34" charset="0"/>
-                <a:ea typeface="Inter" pitchFamily="34" charset="-122"/>
-                <a:cs typeface="Inter" pitchFamily="34" charset="-120"/>
-              </a:rPr>
-              <a:t>but it does NOT grant API access.</a:t>
-            </a:r>
-            <a:endParaRPr lang="en-US" sz="1600" dirty="0"/>
-          </a:p>
-        </p:txBody>
-      </p:sp>
-      <p:sp>
-        <p:nvSpPr>
-          <p:cNvPr id="8" name="Shape 5"/>
-          <p:cNvSpPr/>
-          <p:nvPr/>
-        </p:nvSpPr>
-        <p:spPr>
-          <a:xfrm>
-            <a:off x="566928" y="2743200"/>
-            <a:ext cx="420624" cy="420624"/>
-          </a:xfrm>
-          <a:prstGeom prst="ellipse">
-            <a:avLst/>
-          </a:prstGeom>
-          <a:solidFill>
-            <a:srgbClr val="D97757"/>
-          </a:solidFill>
-          <a:ln/>
-        </p:spPr>
-      </p:sp>
-      <p:pic>
-        <p:nvPicPr>
-          <p:cNvPr id="9" name="Image 1" descr="preencoded.png">    </p:cNvPr>
+          <p:cNvPr id="6" name="Image 0" descr="preencoded.png"/>
           <p:cNvPicPr>
             <a:picLocks noChangeAspect="1"/>
           </p:cNvPicPr>
@@ -6911,8 +6390,8 @@
         </p:blipFill>
         <p:spPr>
           <a:xfrm>
-            <a:off x="676290" y="2852562"/>
-            <a:ext cx="201900" cy="201900"/>
+            <a:off x="972007" y="1886407"/>
+            <a:ext cx="241402" cy="241402"/>
           </a:xfrm>
           <a:prstGeom prst="rect">
             <a:avLst/>
@@ -6921,14 +6400,14 @@
       </p:pic>
       <p:sp>
         <p:nvSpPr>
-          <p:cNvPr id="10" name="Text 6"/>
-          <p:cNvSpPr/>
-          <p:nvPr/>
-        </p:nvSpPr>
-        <p:spPr>
-          <a:xfrm>
-            <a:off x="1133856" y="2706624"/>
-            <a:ext cx="4206240" cy="292608"/>
+          <p:cNvPr id="7" name="Text 4"/>
+          <p:cNvSpPr/>
+          <p:nvPr/>
+        </p:nvSpPr>
+        <p:spPr>
+          <a:xfrm>
+            <a:off x="1572768" y="1417320"/>
+            <a:ext cx="6766560" cy="1097280"/>
           </a:xfrm>
           <a:prstGeom prst="rect">
             <a:avLst/>
@@ -6940,11 +6419,11 @@
           <a:bodyPr wrap="square" lIns="0" tIns="0" rIns="0" bIns="0" rtlCol="0" anchor="ctr"/>
           <a:lstStyle/>
           <a:p>
-            <a:pPr indent="0" marL="0">
-              <a:buNone/>
-            </a:pPr>
-            <a:r>
-              <a:rPr lang="en-US" sz="1450" b="1" dirty="0">
+            <a:pPr marL="0" indent="0">
+              <a:buNone/>
+            </a:pPr>
+            <a:r>
+              <a:rPr lang="en-US" sz="1600" dirty="0">
                 <a:solidFill>
                   <a:srgbClr val="141413"/>
                 </a:solidFill>
@@ -6952,60 +6431,32 @@
                 <a:ea typeface="Inter" pitchFamily="34" charset="-122"/>
                 <a:cs typeface="Inter" pitchFamily="34" charset="-120"/>
               </a:rPr>
-              <a:t>Get an API key</a:t>
-            </a:r>
-            <a:endParaRPr lang="en-US" sz="1450" dirty="0"/>
-          </a:p>
-        </p:txBody>
-      </p:sp>
-      <p:sp>
-        <p:nvSpPr>
-          <p:cNvPr id="11" name="Text 7"/>
-          <p:cNvSpPr/>
-          <p:nvPr/>
-        </p:nvSpPr>
-        <p:spPr>
-          <a:xfrm>
-            <a:off x="4937760" y="2706624"/>
-            <a:ext cx="3566160" cy="292608"/>
-          </a:xfrm>
-          <a:prstGeom prst="rect">
-            <a:avLst/>
-          </a:prstGeom>
-          <a:noFill/>
-          <a:ln/>
-        </p:spPr>
-        <p:txBody>
-          <a:bodyPr wrap="square" lIns="0" tIns="0" rIns="0" bIns="0" rtlCol="0" anchor="ctr"/>
-          <a:lstStyle/>
-          <a:p>
-            <a:pPr indent="0" marL="0">
-              <a:buNone/>
-            </a:pPr>
-            <a:r>
-              <a:rPr lang="en-US" sz="1250" dirty="0">
-                <a:solidFill>
-                  <a:srgbClr val="615C52"/>
+              <a:t>A Claude.ai Pro / Max subscription powers Claude Code (Day 1) — </a:t>
+            </a:r>
+            <a:r>
+              <a:rPr lang="en-US" sz="1600" b="1" dirty="0">
+                <a:solidFill>
+                  <a:srgbClr val="C25E40"/>
                 </a:solidFill>
                 <a:latin typeface="Inter" pitchFamily="34" charset="0"/>
                 <a:ea typeface="Inter" pitchFamily="34" charset="-122"/>
                 <a:cs typeface="Inter" pitchFamily="34" charset="-120"/>
               </a:rPr>
-              <a:t>From the Anthropic Console</a:t>
-            </a:r>
-            <a:endParaRPr lang="en-US" sz="1250" dirty="0"/>
-          </a:p>
-        </p:txBody>
-      </p:sp>
-      <p:sp>
-        <p:nvSpPr>
-          <p:cNvPr id="12" name="Shape 8"/>
-          <p:cNvSpPr/>
-          <p:nvPr/>
-        </p:nvSpPr>
-        <p:spPr>
-          <a:xfrm>
-            <a:off x="566928" y="3246120"/>
+              <a:t>but it does NOT grant API access.</a:t>
+            </a:r>
+            <a:endParaRPr lang="en-US" sz="1600" dirty="0"/>
+          </a:p>
+        </p:txBody>
+      </p:sp>
+      <p:sp>
+        <p:nvSpPr>
+          <p:cNvPr id="8" name="Shape 5"/>
+          <p:cNvSpPr/>
+          <p:nvPr/>
+        </p:nvSpPr>
+        <p:spPr>
+          <a:xfrm>
+            <a:off x="566928" y="2743200"/>
             <a:ext cx="420624" cy="420624"/>
           </a:xfrm>
           <a:prstGeom prst="ellipse">
@@ -7016,10 +6467,17 @@
           </a:solidFill>
           <a:ln/>
         </p:spPr>
+        <p:txBody>
+          <a:bodyPr/>
+          <a:lstStyle/>
+          <a:p>
+            <a:endParaRPr lang="en-US"/>
+          </a:p>
+        </p:txBody>
       </p:sp>
       <p:pic>
         <p:nvPicPr>
-          <p:cNvPr id="13" name="Image 2" descr="preencoded.png">    </p:cNvPr>
+          <p:cNvPr id="9" name="Image 1" descr="preencoded.png"/>
           <p:cNvPicPr>
             <a:picLocks noChangeAspect="1"/>
           </p:cNvPicPr>
@@ -7033,7 +6491,7 @@
         </p:blipFill>
         <p:spPr>
           <a:xfrm>
-            <a:off x="676290" y="3355482"/>
+            <a:off x="676290" y="2852562"/>
             <a:ext cx="201900" cy="201900"/>
           </a:xfrm>
           <a:prstGeom prst="rect">
@@ -7043,13 +6501,13 @@
       </p:pic>
       <p:sp>
         <p:nvSpPr>
-          <p:cNvPr id="14" name="Text 9"/>
-          <p:cNvSpPr/>
-          <p:nvPr/>
-        </p:nvSpPr>
-        <p:spPr>
-          <a:xfrm>
-            <a:off x="1133856" y="3209544"/>
+          <p:cNvPr id="10" name="Text 6"/>
+          <p:cNvSpPr/>
+          <p:nvPr/>
+        </p:nvSpPr>
+        <p:spPr>
+          <a:xfrm>
+            <a:off x="1133856" y="2706624"/>
             <a:ext cx="4206240" cy="292608"/>
           </a:xfrm>
           <a:prstGeom prst="rect">
@@ -7062,7 +6520,7 @@
           <a:bodyPr wrap="square" lIns="0" tIns="0" rIns="0" bIns="0" rtlCol="0" anchor="ctr"/>
           <a:lstStyle/>
           <a:p>
-            <a:pPr indent="0" marL="0">
+            <a:pPr marL="0" indent="0">
               <a:buNone/>
             </a:pPr>
             <a:r>
@@ -7074,7 +6532,7 @@
                 <a:ea typeface="Inter" pitchFamily="34" charset="-122"/>
                 <a:cs typeface="Inter" pitchFamily="34" charset="-120"/>
               </a:rPr>
-              <a:t>Pay-as-you-go billing</a:t>
+              <a:t>Get an API key</a:t>
             </a:r>
             <a:endParaRPr lang="en-US" sz="1450" dirty="0"/>
           </a:p>
@@ -7082,13 +6540,13 @@
       </p:sp>
       <p:sp>
         <p:nvSpPr>
-          <p:cNvPr id="15" name="Text 10"/>
-          <p:cNvSpPr/>
-          <p:nvPr/>
-        </p:nvSpPr>
-        <p:spPr>
-          <a:xfrm>
-            <a:off x="4937760" y="3209544"/>
+          <p:cNvPr id="11" name="Text 7"/>
+          <p:cNvSpPr/>
+          <p:nvPr/>
+        </p:nvSpPr>
+        <p:spPr>
+          <a:xfrm>
+            <a:off x="4937760" y="2706624"/>
             <a:ext cx="3566160" cy="292608"/>
           </a:xfrm>
           <a:prstGeom prst="rect">
@@ -7101,7 +6559,7 @@
           <a:bodyPr wrap="square" lIns="0" tIns="0" rIns="0" bIns="0" rtlCol="0" anchor="ctr"/>
           <a:lstStyle/>
           <a:p>
-            <a:pPr indent="0" marL="0">
+            <a:pPr marL="0" indent="0">
               <a:buNone/>
             </a:pPr>
             <a:r>
@@ -7113,7 +6571,7 @@
                 <a:ea typeface="Inter" pitchFamily="34" charset="-122"/>
                 <a:cs typeface="Inter" pitchFamily="34" charset="-120"/>
               </a:rPr>
-              <a:t>Metered, per-token usage</a:t>
+              <a:t>From the Anthropic Console</a:t>
             </a:r>
             <a:endParaRPr lang="en-US" sz="1250" dirty="0"/>
           </a:p>
@@ -7121,13 +6579,13 @@
       </p:sp>
       <p:sp>
         <p:nvSpPr>
-          <p:cNvPr id="16" name="Shape 11"/>
-          <p:cNvSpPr/>
-          <p:nvPr/>
-        </p:nvSpPr>
-        <p:spPr>
-          <a:xfrm>
-            <a:off x="566928" y="3749040"/>
+          <p:cNvPr id="12" name="Shape 8"/>
+          <p:cNvSpPr/>
+          <p:nvPr/>
+        </p:nvSpPr>
+        <p:spPr>
+          <a:xfrm>
+            <a:off x="566928" y="3246120"/>
             <a:ext cx="420624" cy="420624"/>
           </a:xfrm>
           <a:prstGeom prst="ellipse">
@@ -7138,10 +6596,17 @@
           </a:solidFill>
           <a:ln/>
         </p:spPr>
+        <p:txBody>
+          <a:bodyPr/>
+          <a:lstStyle/>
+          <a:p>
+            <a:endParaRPr lang="en-US"/>
+          </a:p>
+        </p:txBody>
       </p:sp>
       <p:pic>
         <p:nvPicPr>
-          <p:cNvPr id="17" name="Image 3" descr="preencoded.png">    </p:cNvPr>
+          <p:cNvPr id="13" name="Image 2" descr="preencoded.png"/>
           <p:cNvPicPr>
             <a:picLocks noChangeAspect="1"/>
           </p:cNvPicPr>
@@ -7155,7 +6620,7 @@
         </p:blipFill>
         <p:spPr>
           <a:xfrm>
-            <a:off x="676290" y="3858402"/>
+            <a:off x="676290" y="3355482"/>
             <a:ext cx="201900" cy="201900"/>
           </a:xfrm>
           <a:prstGeom prst="rect">
@@ -7165,13 +6630,13 @@
       </p:pic>
       <p:sp>
         <p:nvSpPr>
-          <p:cNvPr id="18" name="Text 12"/>
-          <p:cNvSpPr/>
-          <p:nvPr/>
-        </p:nvSpPr>
-        <p:spPr>
-          <a:xfrm>
-            <a:off x="1133856" y="3712464"/>
+          <p:cNvPr id="14" name="Text 9"/>
+          <p:cNvSpPr/>
+          <p:nvPr/>
+        </p:nvSpPr>
+        <p:spPr>
+          <a:xfrm>
+            <a:off x="1133856" y="3209544"/>
             <a:ext cx="4206240" cy="292608"/>
           </a:xfrm>
           <a:prstGeom prst="rect">
@@ -7184,7 +6649,7 @@
           <a:bodyPr wrap="square" lIns="0" tIns="0" rIns="0" bIns="0" rtlCol="0" anchor="ctr"/>
           <a:lstStyle/>
           <a:p>
-            <a:pPr indent="0" marL="0">
+            <a:pPr marL="0" indent="0">
               <a:buNone/>
             </a:pPr>
             <a:r>
@@ -7196,7 +6661,7 @@
                 <a:ea typeface="Inter" pitchFamily="34" charset="-122"/>
                 <a:cs typeface="Inter" pitchFamily="34" charset="-120"/>
               </a:rPr>
-              <a:t>Trial credit covers the workshop</a:t>
+              <a:t>Pay-as-you-go billing</a:t>
             </a:r>
             <a:endParaRPr lang="en-US" sz="1450" dirty="0"/>
           </a:p>
@@ -7204,13 +6669,13 @@
       </p:sp>
       <p:sp>
         <p:nvSpPr>
-          <p:cNvPr id="19" name="Text 13"/>
-          <p:cNvSpPr/>
-          <p:nvPr/>
-        </p:nvSpPr>
-        <p:spPr>
-          <a:xfrm>
-            <a:off x="4937760" y="3712464"/>
+          <p:cNvPr id="15" name="Text 10"/>
+          <p:cNvSpPr/>
+          <p:nvPr/>
+        </p:nvSpPr>
+        <p:spPr>
+          <a:xfrm>
+            <a:off x="4937760" y="3209544"/>
             <a:ext cx="3566160" cy="292608"/>
           </a:xfrm>
           <a:prstGeom prst="rect">
@@ -7223,7 +6688,7 @@
           <a:bodyPr wrap="square" lIns="0" tIns="0" rIns="0" bIns="0" rtlCol="0" anchor="ctr"/>
           <a:lstStyle/>
           <a:p>
-            <a:pPr indent="0" marL="0">
+            <a:pPr marL="0" indent="0">
               <a:buNone/>
             </a:pPr>
             <a:r>
@@ -7235,7 +6700,7 @@
                 <a:ea typeface="Inter" pitchFamily="34" charset="-122"/>
                 <a:cs typeface="Inter" pitchFamily="34" charset="-120"/>
               </a:rPr>
-              <a:t>No real spend needed today</a:t>
+              <a:t>Metered, per-token usage</a:t>
             </a:r>
             <a:endParaRPr lang="en-US" sz="1250" dirty="0"/>
           </a:p>
@@ -7243,14 +6708,65 @@
       </p:sp>
       <p:sp>
         <p:nvSpPr>
-          <p:cNvPr id="20" name="Text 14"/>
-          <p:cNvSpPr/>
-          <p:nvPr/>
-        </p:nvSpPr>
-        <p:spPr>
-          <a:xfrm>
-            <a:off x="548640" y="4828032"/>
-            <a:ext cx="3657600" cy="274320"/>
+          <p:cNvPr id="16" name="Shape 11"/>
+          <p:cNvSpPr/>
+          <p:nvPr/>
+        </p:nvSpPr>
+        <p:spPr>
+          <a:xfrm>
+            <a:off x="566928" y="3749040"/>
+            <a:ext cx="420624" cy="420624"/>
+          </a:xfrm>
+          <a:prstGeom prst="ellipse">
+            <a:avLst/>
+          </a:prstGeom>
+          <a:solidFill>
+            <a:srgbClr val="D97757"/>
+          </a:solidFill>
+          <a:ln/>
+        </p:spPr>
+        <p:txBody>
+          <a:bodyPr/>
+          <a:lstStyle/>
+          <a:p>
+            <a:endParaRPr lang="en-US"/>
+          </a:p>
+        </p:txBody>
+      </p:sp>
+      <p:pic>
+        <p:nvPicPr>
+          <p:cNvPr id="17" name="Image 3" descr="preencoded.png"/>
+          <p:cNvPicPr>
+            <a:picLocks noChangeAspect="1"/>
+          </p:cNvPicPr>
+          <p:nvPr/>
+        </p:nvPicPr>
+        <p:blipFill>
+          <a:blip r:embed="rId5"/>
+          <a:stretch>
+            <a:fillRect/>
+          </a:stretch>
+        </p:blipFill>
+        <p:spPr>
+          <a:xfrm>
+            <a:off x="676290" y="3858402"/>
+            <a:ext cx="201900" cy="201900"/>
+          </a:xfrm>
+          <a:prstGeom prst="rect">
+            <a:avLst/>
+          </a:prstGeom>
+        </p:spPr>
+      </p:pic>
+      <p:sp>
+        <p:nvSpPr>
+          <p:cNvPr id="18" name="Text 12"/>
+          <p:cNvSpPr/>
+          <p:nvPr/>
+        </p:nvSpPr>
+        <p:spPr>
+          <a:xfrm>
+            <a:off x="1133856" y="3712464"/>
+            <a:ext cx="4206240" cy="292608"/>
           </a:xfrm>
           <a:prstGeom prst="rect">
             <a:avLst/>
@@ -7259,37 +6775,37 @@
           <a:ln/>
         </p:spPr>
         <p:txBody>
-          <a:bodyPr wrap="square" rtlCol="0" anchor="ctr"/>
-          <a:lstStyle/>
-          <a:p>
-            <a:pPr indent="0" marL="0">
-              <a:buNone/>
-            </a:pPr>
-            <a:r>
-              <a:rPr lang="en-US" sz="900" dirty="0">
-                <a:solidFill>
-                  <a:srgbClr val="615C52"/>
+          <a:bodyPr wrap="square" lIns="0" tIns="0" rIns="0" bIns="0" rtlCol="0" anchor="ctr"/>
+          <a:lstStyle/>
+          <a:p>
+            <a:pPr marL="0" indent="0">
+              <a:buNone/>
+            </a:pPr>
+            <a:r>
+              <a:rPr lang="en-US" sz="1450" b="1" dirty="0">
+                <a:solidFill>
+                  <a:srgbClr val="141413"/>
                 </a:solidFill>
                 <a:latin typeface="Inter" pitchFamily="34" charset="0"/>
                 <a:ea typeface="Inter" pitchFamily="34" charset="-122"/>
                 <a:cs typeface="Inter" pitchFamily="34" charset="-120"/>
               </a:rPr>
-              <a:t>dotnetclaude.com</a:t>
-            </a:r>
-            <a:endParaRPr lang="en-US" sz="900" dirty="0"/>
-          </a:p>
-        </p:txBody>
-      </p:sp>
-      <p:sp>
-        <p:nvSpPr>
-          <p:cNvPr id="21" name="Text 15"/>
-          <p:cNvSpPr/>
-          <p:nvPr/>
-        </p:nvSpPr>
-        <p:spPr>
-          <a:xfrm>
-            <a:off x="4937760" y="4828032"/>
-            <a:ext cx="3657600" cy="274320"/>
+              <a:t>Trial credit covers the workshop</a:t>
+            </a:r>
+            <a:endParaRPr lang="en-US" sz="1450" dirty="0"/>
+          </a:p>
+        </p:txBody>
+      </p:sp>
+      <p:sp>
+        <p:nvSpPr>
+          <p:cNvPr id="19" name="Text 13"/>
+          <p:cNvSpPr/>
+          <p:nvPr/>
+        </p:nvSpPr>
+        <p:spPr>
+          <a:xfrm>
+            <a:off x="4937760" y="3712464"/>
+            <a:ext cx="3566160" cy="292608"/>
           </a:xfrm>
           <a:prstGeom prst="rect">
             <a:avLst/>
@@ -7298,14 +6814,14 @@
           <a:ln/>
         </p:spPr>
         <p:txBody>
-          <a:bodyPr wrap="square" rtlCol="0" anchor="ctr"/>
-          <a:lstStyle/>
-          <a:p>
-            <a:pPr algn="r" indent="0" marL="0">
-              <a:buNone/>
-            </a:pPr>
-            <a:r>
-              <a:rPr lang="en-US" sz="900" dirty="0">
+          <a:bodyPr wrap="square" lIns="0" tIns="0" rIns="0" bIns="0" rtlCol="0" anchor="ctr"/>
+          <a:lstStyle/>
+          <a:p>
+            <a:pPr marL="0" indent="0">
+              <a:buNone/>
+            </a:pPr>
+            <a:r>
+              <a:rPr lang="en-US" sz="1250" dirty="0">
                 <a:solidFill>
                   <a:srgbClr val="615C52"/>
                 </a:solidFill>
@@ -7313,22 +6829,22 @@
                 <a:ea typeface="Inter" pitchFamily="34" charset="-122"/>
                 <a:cs typeface="Inter" pitchFamily="34" charset="-120"/>
               </a:rPr>
-              <a:t>Day 2  ·  5/11</a:t>
-            </a:r>
-            <a:endParaRPr lang="en-US" sz="900" dirty="0"/>
-          </a:p>
-        </p:txBody>
-      </p:sp>
-      <p:sp>
-        <p:nvSpPr>
-          <p:cNvPr id="22" name="Text 16"/>
-          <p:cNvSpPr/>
-          <p:nvPr/>
-        </p:nvSpPr>
-        <p:spPr>
-          <a:xfrm>
-            <a:off x="548640" y="4462272"/>
-            <a:ext cx="8046720" cy="274320"/>
+              <a:t>No real spend needed today</a:t>
+            </a:r>
+            <a:endParaRPr lang="en-US" sz="1250" dirty="0"/>
+          </a:p>
+        </p:txBody>
+      </p:sp>
+      <p:sp>
+        <p:nvSpPr>
+          <p:cNvPr id="20" name="Text 14"/>
+          <p:cNvSpPr/>
+          <p:nvPr/>
+        </p:nvSpPr>
+        <p:spPr>
+          <a:xfrm>
+            <a:off x="548640" y="4828032"/>
+            <a:ext cx="3657600" cy="274320"/>
           </a:xfrm>
           <a:prstGeom prst="rect">
             <a:avLst/>
@@ -7337,14 +6853,14 @@
           <a:ln/>
         </p:spPr>
         <p:txBody>
-          <a:bodyPr wrap="square" lIns="0" tIns="0" rIns="0" bIns="0" rtlCol="0" anchor="ctr"/>
-          <a:lstStyle/>
-          <a:p>
-            <a:pPr indent="0" marL="0">
-              <a:buNone/>
-            </a:pPr>
-            <a:r>
-              <a:rPr lang="en-US" sz="1000" i="1" dirty="0">
+          <a:bodyPr wrap="square" rtlCol="0" anchor="ctr"/>
+          <a:lstStyle/>
+          <a:p>
+            <a:pPr marL="0" indent="0">
+              <a:buNone/>
+            </a:pPr>
+            <a:r>
+              <a:rPr lang="en-US" sz="900" dirty="0">
                 <a:solidFill>
                   <a:srgbClr val="615C52"/>
                 </a:solidFill>
@@ -7352,9 +6868,48 @@
                 <a:ea typeface="Inter" pitchFamily="34" charset="-122"/>
                 <a:cs typeface="Inter" pitchFamily="34" charset="-120"/>
               </a:rPr>
-              <a:t>▸ Stop here until everyone has a Console API key — Pro/Max alone won't work today.</a:t>
-            </a:r>
-            <a:endParaRPr lang="en-US" sz="1000" dirty="0"/>
+              <a:t>dotnetclaude.com</a:t>
+            </a:r>
+            <a:endParaRPr lang="en-US" sz="900" dirty="0"/>
+          </a:p>
+        </p:txBody>
+      </p:sp>
+      <p:sp>
+        <p:nvSpPr>
+          <p:cNvPr id="21" name="Text 15"/>
+          <p:cNvSpPr/>
+          <p:nvPr/>
+        </p:nvSpPr>
+        <p:spPr>
+          <a:xfrm>
+            <a:off x="4937760" y="4828032"/>
+            <a:ext cx="3657600" cy="274320"/>
+          </a:xfrm>
+          <a:prstGeom prst="rect">
+            <a:avLst/>
+          </a:prstGeom>
+          <a:noFill/>
+          <a:ln/>
+        </p:spPr>
+        <p:txBody>
+          <a:bodyPr wrap="square" rtlCol="0" anchor="ctr"/>
+          <a:lstStyle/>
+          <a:p>
+            <a:pPr marL="0" indent="0" algn="r">
+              <a:buNone/>
+            </a:pPr>
+            <a:r>
+              <a:rPr lang="en-US" sz="900" dirty="0">
+                <a:solidFill>
+                  <a:srgbClr val="615C52"/>
+                </a:solidFill>
+                <a:latin typeface="Inter" pitchFamily="34" charset="0"/>
+                <a:ea typeface="Inter" pitchFamily="34" charset="-122"/>
+                <a:cs typeface="Inter" pitchFamily="34" charset="-120"/>
+              </a:rPr>
+              <a:t>Day 2  ·  5/11</a:t>
+            </a:r>
+            <a:endParaRPr lang="en-US" sz="900" dirty="0"/>
           </a:p>
         </p:txBody>
       </p:sp>
@@ -7374,6 +6929,7 @@
         <a:solidFill>
           <a:srgbClr val="F0EEE6"/>
         </a:solidFill>
+        <a:effectLst/>
       </p:bgPr>
     </p:bg>
     <p:spTree>
@@ -7411,11 +6967,11 @@
           <a:bodyPr wrap="square" lIns="0" tIns="0" rIns="0" bIns="0" rtlCol="0" anchor="ctr"/>
           <a:lstStyle/>
           <a:p>
-            <a:pPr indent="0" marL="0">
-              <a:buNone/>
-            </a:pPr>
-            <a:r>
-              <a:rPr lang="en-US" sz="1100" b="1" spc="200" kern="0" dirty="0">
+            <a:pPr marL="0" indent="0">
+              <a:buNone/>
+            </a:pPr>
+            <a:r>
+              <a:rPr lang="en-US" sz="1100" b="1" kern="0" spc="200" dirty="0">
                 <a:solidFill>
                   <a:srgbClr val="C25E40"/>
                 </a:solidFill>
@@ -7450,7 +7006,7 @@
           <a:bodyPr wrap="square" lIns="0" tIns="0" rIns="0" bIns="0" rtlCol="0" anchor="ctr"/>
           <a:lstStyle/>
           <a:p>
-            <a:pPr indent="0" marL="0">
+            <a:pPr marL="0" indent="0">
               <a:buNone/>
             </a:pPr>
             <a:r>
@@ -7494,6 +7050,13 @@
             <a:prstDash val="solid"/>
           </a:ln>
         </p:spPr>
+        <p:txBody>
+          <a:bodyPr/>
+          <a:lstStyle/>
+          <a:p>
+            <a:endParaRPr lang="en-US"/>
+          </a:p>
+        </p:txBody>
       </p:sp>
       <p:sp>
         <p:nvSpPr>
@@ -7514,17 +7077,24 @@
           </a:solidFill>
           <a:ln/>
         </p:spPr>
+        <p:txBody>
+          <a:bodyPr/>
+          <a:lstStyle/>
+          <a:p>
+            <a:endParaRPr lang="en-US"/>
+          </a:p>
+        </p:txBody>
       </p:sp>
       <p:pic>
         <p:nvPicPr>
-          <p:cNvPr id="6" name="Image 0" descr="preencoded.png">    </p:cNvPr>
+          <p:cNvPr id="6" name="Image 0" descr="preencoded.png"/>
           <p:cNvPicPr>
             <a:picLocks noChangeAspect="1"/>
           </p:cNvPicPr>
           <p:nvPr/>
         </p:nvPicPr>
         <p:blipFill>
-          <a:blip r:embed="rId1"/>
+          <a:blip r:embed="rId2"/>
           <a:stretch>
             <a:fillRect/>
           </a:stretch>
@@ -7560,7 +7130,7 @@
           <a:bodyPr wrap="square" lIns="0" tIns="0" rIns="0" bIns="0" rtlCol="0" anchor="ctr"/>
           <a:lstStyle/>
           <a:p>
-            <a:pPr indent="0" marL="0">
+            <a:pPr marL="0" indent="0">
               <a:buNone/>
             </a:pPr>
             <a:r>
@@ -7599,7 +7169,7 @@
           <a:bodyPr wrap="square" lIns="0" tIns="0" rIns="0" bIns="0" rtlCol="0" anchor="ctr"/>
           <a:lstStyle/>
           <a:p>
-            <a:pPr indent="0" marL="0">
+            <a:pPr marL="0" indent="0">
               <a:buNone/>
             </a:pPr>
             <a:r>
@@ -7643,6 +7213,13 @@
             <a:prstDash val="solid"/>
           </a:ln>
         </p:spPr>
+        <p:txBody>
+          <a:bodyPr/>
+          <a:lstStyle/>
+          <a:p>
+            <a:endParaRPr lang="en-US"/>
+          </a:p>
+        </p:txBody>
       </p:sp>
       <p:sp>
         <p:nvSpPr>
@@ -7663,17 +7240,24 @@
           </a:solidFill>
           <a:ln/>
         </p:spPr>
+        <p:txBody>
+          <a:bodyPr/>
+          <a:lstStyle/>
+          <a:p>
+            <a:endParaRPr lang="en-US"/>
+          </a:p>
+        </p:txBody>
       </p:sp>
       <p:pic>
         <p:nvPicPr>
-          <p:cNvPr id="11" name="Image 1" descr="preencoded.png">    </p:cNvPr>
+          <p:cNvPr id="11" name="Image 1" descr="preencoded.png"/>
           <p:cNvPicPr>
             <a:picLocks noChangeAspect="1"/>
           </p:cNvPicPr>
           <p:nvPr/>
         </p:nvPicPr>
         <p:blipFill>
-          <a:blip r:embed="rId2"/>
+          <a:blip r:embed="rId3"/>
           <a:stretch>
             <a:fillRect/>
           </a:stretch>
@@ -7709,7 +7293,7 @@
           <a:bodyPr wrap="square" lIns="0" tIns="0" rIns="0" bIns="0" rtlCol="0" anchor="ctr"/>
           <a:lstStyle/>
           <a:p>
-            <a:pPr indent="0" marL="0">
+            <a:pPr marL="0" indent="0">
               <a:buNone/>
             </a:pPr>
             <a:r>
@@ -7748,7 +7332,7 @@
           <a:bodyPr wrap="square" lIns="0" tIns="0" rIns="0" bIns="0" rtlCol="0" anchor="ctr"/>
           <a:lstStyle/>
           <a:p>
-            <a:pPr indent="0" marL="0">
+            <a:pPr marL="0" indent="0">
               <a:buNone/>
             </a:pPr>
             <a:r>
@@ -7792,6 +7376,13 @@
             <a:prstDash val="solid"/>
           </a:ln>
         </p:spPr>
+        <p:txBody>
+          <a:bodyPr/>
+          <a:lstStyle/>
+          <a:p>
+            <a:endParaRPr lang="en-US"/>
+          </a:p>
+        </p:txBody>
       </p:sp>
       <p:sp>
         <p:nvSpPr>
@@ -7812,17 +7403,24 @@
           </a:solidFill>
           <a:ln/>
         </p:spPr>
+        <p:txBody>
+          <a:bodyPr/>
+          <a:lstStyle/>
+          <a:p>
+            <a:endParaRPr lang="en-US"/>
+          </a:p>
+        </p:txBody>
       </p:sp>
       <p:pic>
         <p:nvPicPr>
-          <p:cNvPr id="16" name="Image 2" descr="preencoded.png">    </p:cNvPr>
+          <p:cNvPr id="16" name="Image 2" descr="preencoded.png"/>
           <p:cNvPicPr>
             <a:picLocks noChangeAspect="1"/>
           </p:cNvPicPr>
           <p:nvPr/>
         </p:nvPicPr>
         <p:blipFill>
-          <a:blip r:embed="rId3"/>
+          <a:blip r:embed="rId4"/>
           <a:stretch>
             <a:fillRect/>
           </a:stretch>
@@ -7858,7 +7456,7 @@
           <a:bodyPr wrap="square" lIns="0" tIns="0" rIns="0" bIns="0" rtlCol="0" anchor="ctr"/>
           <a:lstStyle/>
           <a:p>
-            <a:pPr indent="0" marL="0">
+            <a:pPr marL="0" indent="0">
               <a:buNone/>
             </a:pPr>
             <a:r>
@@ -7897,7 +7495,7 @@
           <a:bodyPr wrap="square" lIns="0" tIns="0" rIns="0" bIns="0" rtlCol="0" anchor="ctr"/>
           <a:lstStyle/>
           <a:p>
-            <a:pPr indent="0" marL="0">
+            <a:pPr marL="0" indent="0">
               <a:buNone/>
             </a:pPr>
             <a:r>
@@ -7941,6 +7539,13 @@
             <a:prstDash val="solid"/>
           </a:ln>
         </p:spPr>
+        <p:txBody>
+          <a:bodyPr/>
+          <a:lstStyle/>
+          <a:p>
+            <a:endParaRPr lang="en-US"/>
+          </a:p>
+        </p:txBody>
       </p:sp>
       <p:sp>
         <p:nvSpPr>
@@ -7961,17 +7566,24 @@
           </a:solidFill>
           <a:ln/>
         </p:spPr>
+        <p:txBody>
+          <a:bodyPr/>
+          <a:lstStyle/>
+          <a:p>
+            <a:endParaRPr lang="en-US"/>
+          </a:p>
+        </p:txBody>
       </p:sp>
       <p:pic>
         <p:nvPicPr>
-          <p:cNvPr id="21" name="Image 3" descr="preencoded.png">    </p:cNvPr>
+          <p:cNvPr id="21" name="Image 3" descr="preencoded.png"/>
           <p:cNvPicPr>
             <a:picLocks noChangeAspect="1"/>
           </p:cNvPicPr>
           <p:nvPr/>
         </p:nvPicPr>
         <p:blipFill>
-          <a:blip r:embed="rId4"/>
+          <a:blip r:embed="rId5"/>
           <a:stretch>
             <a:fillRect/>
           </a:stretch>
@@ -8007,7 +7619,7 @@
           <a:bodyPr wrap="square" lIns="0" tIns="0" rIns="0" bIns="0" rtlCol="0" anchor="ctr"/>
           <a:lstStyle/>
           <a:p>
-            <a:pPr indent="0" marL="0">
+            <a:pPr marL="0" indent="0">
               <a:buNone/>
             </a:pPr>
             <a:r>
@@ -8046,7 +7658,7 @@
           <a:bodyPr wrap="square" lIns="0" tIns="0" rIns="0" bIns="0" rtlCol="0" anchor="ctr"/>
           <a:lstStyle/>
           <a:p>
-            <a:pPr indent="0" marL="0">
+            <a:pPr marL="0" indent="0">
               <a:buNone/>
             </a:pPr>
             <a:r>
@@ -8085,7 +7697,7 @@
           <a:bodyPr wrap="square" rtlCol="0" anchor="ctr"/>
           <a:lstStyle/>
           <a:p>
-            <a:pPr indent="0" marL="0">
+            <a:pPr marL="0" indent="0">
               <a:buNone/>
             </a:pPr>
             <a:r>
@@ -8124,7 +7736,7 @@
           <a:bodyPr wrap="square" rtlCol="0" anchor="ctr"/>
           <a:lstStyle/>
           <a:p>
-            <a:pPr algn="r" indent="0" marL="0">
+            <a:pPr marL="0" indent="0" algn="r">
               <a:buNone/>
             </a:pPr>
             <a:r>
@@ -8139,45 +7751,6 @@
               <a:t>Day 2  ·  6/11</a:t>
             </a:r>
             <a:endParaRPr lang="en-US" sz="900" dirty="0"/>
-          </a:p>
-        </p:txBody>
-      </p:sp>
-      <p:sp>
-        <p:nvSpPr>
-          <p:cNvPr id="26" name="Text 20"/>
-          <p:cNvSpPr/>
-          <p:nvPr/>
-        </p:nvSpPr>
-        <p:spPr>
-          <a:xfrm>
-            <a:off x="548640" y="4462272"/>
-            <a:ext cx="8046720" cy="274320"/>
-          </a:xfrm>
-          <a:prstGeom prst="rect">
-            <a:avLst/>
-          </a:prstGeom>
-          <a:noFill/>
-          <a:ln/>
-        </p:spPr>
-        <p:txBody>
-          <a:bodyPr wrap="square" lIns="0" tIns="0" rIns="0" bIns="0" rtlCol="0" anchor="ctr"/>
-          <a:lstStyle/>
-          <a:p>
-            <a:pPr indent="0" marL="0">
-              <a:buNone/>
-            </a:pPr>
-            <a:r>
-              <a:rPr lang="en-US" sz="1000" i="1" dirty="0">
-                <a:solidFill>
-                  <a:srgbClr val="615C52"/>
-                </a:solidFill>
-                <a:latin typeface="Inter" pitchFamily="34" charset="0"/>
-                <a:ea typeface="Inter" pitchFamily="34" charset="-122"/>
-                <a:cs typeface="Inter" pitchFamily="34" charset="-120"/>
-              </a:rPr>
-              <a:t>▸ Docker must be running before S3; the Ollama path keeps everything free and local.</a:t>
-            </a:r>
-            <a:endParaRPr lang="en-US" sz="1000" dirty="0"/>
           </a:p>
         </p:txBody>
       </p:sp>
@@ -8197,6 +7770,7 @@
         <a:solidFill>
           <a:srgbClr val="F0EEE6"/>
         </a:solidFill>
+        <a:effectLst/>
       </p:bgPr>
     </p:bg>
     <p:spTree>
@@ -8234,11 +7808,11 @@
           <a:bodyPr wrap="square" lIns="0" tIns="0" rIns="0" bIns="0" rtlCol="0" anchor="ctr"/>
           <a:lstStyle/>
           <a:p>
-            <a:pPr indent="0" marL="0">
-              <a:buNone/>
-            </a:pPr>
-            <a:r>
-              <a:rPr lang="en-US" sz="1100" b="1" spc="200" kern="0" dirty="0">
+            <a:pPr marL="0" indent="0">
+              <a:buNone/>
+            </a:pPr>
+            <a:r>
+              <a:rPr lang="en-US" sz="1100" b="1" kern="0" spc="200" dirty="0">
                 <a:solidFill>
                   <a:srgbClr val="C25E40"/>
                 </a:solidFill>
@@ -8273,7 +7847,7 @@
           <a:bodyPr wrap="square" lIns="0" tIns="0" rIns="0" bIns="0" rtlCol="0" anchor="ctr"/>
           <a:lstStyle/>
           <a:p>
-            <a:pPr indent="0" marL="0">
+            <a:pPr marL="0" indent="0">
               <a:buNone/>
             </a:pPr>
             <a:r>
@@ -8312,13 +7886,20 @@
           </a:solidFill>
           <a:ln/>
           <a:effectLst>
-            <a:outerShdw sx="100000" sy="100000" kx="0" ky="0" algn="bl" rotWithShape="0" blurRad="88900" dist="38100" dir="5400000">
+            <a:outerShdw blurRad="88900" dist="38100" dir="5400000" algn="bl" rotWithShape="0">
               <a:srgbClr val="000000">
                 <a:alpha val="10000"/>
               </a:srgbClr>
             </a:outerShdw>
           </a:effectLst>
         </p:spPr>
+        <p:txBody>
+          <a:bodyPr/>
+          <a:lstStyle/>
+          <a:p>
+            <a:endParaRPr lang="en-US"/>
+          </a:p>
+        </p:txBody>
       </p:sp>
       <p:sp>
         <p:nvSpPr>
@@ -8339,6 +7920,13 @@
           </a:solidFill>
           <a:ln/>
         </p:spPr>
+        <p:txBody>
+          <a:bodyPr/>
+          <a:lstStyle/>
+          <a:p>
+            <a:endParaRPr lang="en-US"/>
+          </a:p>
+        </p:txBody>
       </p:sp>
       <p:sp>
         <p:nvSpPr>
@@ -8359,6 +7947,13 @@
           </a:solidFill>
           <a:ln/>
         </p:spPr>
+        <p:txBody>
+          <a:bodyPr/>
+          <a:lstStyle/>
+          <a:p>
+            <a:endParaRPr lang="en-US"/>
+          </a:p>
+        </p:txBody>
       </p:sp>
       <p:sp>
         <p:nvSpPr>
@@ -8379,6 +7974,13 @@
           </a:solidFill>
           <a:ln/>
         </p:spPr>
+        <p:txBody>
+          <a:bodyPr/>
+          <a:lstStyle/>
+          <a:p>
+            <a:endParaRPr lang="en-US"/>
+          </a:p>
+        </p:txBody>
       </p:sp>
       <p:sp>
         <p:nvSpPr>
@@ -8401,7 +8003,7 @@
           <a:bodyPr wrap="square" lIns="0" tIns="0" rIns="0" bIns="0" rtlCol="0" anchor="ctr"/>
           <a:lstStyle/>
           <a:p>
-            <a:pPr indent="0" marL="0">
+            <a:pPr marL="0" indent="0">
               <a:buNone/>
             </a:pPr>
             <a:r>
@@ -8440,7 +8042,7 @@
           <a:bodyPr wrap="square" lIns="0" tIns="0" rIns="0" bIns="0" rtlCol="0" anchor="t"/>
           <a:lstStyle/>
           <a:p>
-            <a:pPr indent="0" marL="0">
+            <a:pPr marL="0" indent="0">
               <a:lnSpc>
                 <a:spcPct val="135000"/>
               </a:lnSpc>
@@ -8460,7 +8062,7 @@
             <a:endParaRPr lang="en-US" sz="1500" dirty="0"/>
           </a:p>
           <a:p>
-            <a:pPr indent="0" marL="0">
+            <a:pPr marL="0" indent="0">
               <a:lnSpc>
                 <a:spcPct val="135000"/>
               </a:lnSpc>
@@ -8477,44 +8079,83 @@
               </a:rPr>
               <a:t>$ </a:t>
             </a:r>
-            <a:pPr indent="0" marL="0">
+            <a:r>
+              <a:rPr lang="en-US" sz="1500" dirty="0">
+                <a:solidFill>
+                  <a:srgbClr val="E9E5DD"/>
+                </a:solidFill>
+                <a:latin typeface="Courier New" pitchFamily="34" charset="0"/>
+                <a:ea typeface="Courier New" pitchFamily="34" charset="-122"/>
+                <a:cs typeface="Courier New" pitchFamily="34" charset="-120"/>
+              </a:rPr>
+              <a:t>dotnet user-secrets init</a:t>
+            </a:r>
+            <a:endParaRPr lang="en-US" sz="1500" dirty="0"/>
+          </a:p>
+          <a:p>
+            <a:pPr marL="0" indent="0">
               <a:lnSpc>
                 <a:spcPct val="135000"/>
               </a:lnSpc>
               <a:buNone/>
             </a:pPr>
             <a:r>
-              <a:rPr lang="en-US" sz="1500" dirty="0">
-                <a:solidFill>
-                  <a:srgbClr val="E9E5DD"/>
+              <a:rPr lang="en-US" sz="1500" b="1" dirty="0">
+                <a:solidFill>
+                  <a:srgbClr val="D97757"/>
                 </a:solidFill>
                 <a:latin typeface="Courier New" pitchFamily="34" charset="0"/>
                 <a:ea typeface="Courier New" pitchFamily="34" charset="-122"/>
                 <a:cs typeface="Courier New" pitchFamily="34" charset="-120"/>
               </a:rPr>
-              <a:t>dotnet user-secrets init</a:t>
+              <a:t>$ </a:t>
+            </a:r>
+            <a:r>
+              <a:rPr lang="en-US" sz="1500" dirty="0">
+                <a:solidFill>
+                  <a:srgbClr val="E9E5DD"/>
+                </a:solidFill>
+                <a:latin typeface="Courier New" pitchFamily="34" charset="0"/>
+                <a:ea typeface="Courier New" pitchFamily="34" charset="-122"/>
+                <a:cs typeface="Courier New" pitchFamily="34" charset="-120"/>
+              </a:rPr>
+              <a:t>dotnet user-secrets set \</a:t>
             </a:r>
             <a:endParaRPr lang="en-US" sz="1500" dirty="0"/>
           </a:p>
           <a:p>
-            <a:pPr indent="0" marL="0">
+            <a:pPr marL="0" indent="0">
               <a:lnSpc>
                 <a:spcPct val="135000"/>
               </a:lnSpc>
               <a:buNone/>
             </a:pPr>
             <a:r>
-              <a:rPr lang="en-US" sz="1500" b="1" dirty="0">
-                <a:solidFill>
-                  <a:srgbClr val="D97757"/>
+              <a:rPr lang="en-US" sz="1500" dirty="0">
+                <a:solidFill>
+                  <a:srgbClr val="E9E5DD"/>
                 </a:solidFill>
                 <a:latin typeface="Courier New" pitchFamily="34" charset="0"/>
                 <a:ea typeface="Courier New" pitchFamily="34" charset="-122"/>
                 <a:cs typeface="Courier New" pitchFamily="34" charset="-120"/>
               </a:rPr>
-              <a:t>$ </a:t>
-            </a:r>
-            <a:pPr indent="0" marL="0">
+              <a:t>    "Anthropic:ApiKey" </a:t>
+            </a:r>
+            <a:r>
+              <a:rPr lang="en-US" sz="1500" dirty="0">
+                <a:solidFill>
+                  <a:srgbClr val="E0A04A"/>
+                </a:solidFill>
+                <a:latin typeface="Courier New" pitchFamily="34" charset="0"/>
+                <a:ea typeface="Courier New" pitchFamily="34" charset="-122"/>
+                <a:cs typeface="Courier New" pitchFamily="34" charset="-120"/>
+              </a:rPr>
+              <a:t>"sk-ant-..."</a:t>
+            </a:r>
+            <a:endParaRPr lang="en-US" sz="1500" dirty="0"/>
+          </a:p>
+          <a:p>
+            <a:pPr marL="0" indent="0">
               <a:lnSpc>
                 <a:spcPct val="135000"/>
               </a:lnSpc>
@@ -8523,69 +8164,12 @@
             <a:r>
               <a:rPr lang="en-US" sz="1500" dirty="0">
                 <a:solidFill>
-                  <a:srgbClr val="E9E5DD"/>
+                  <a:srgbClr val="9A958B"/>
                 </a:solidFill>
                 <a:latin typeface="Courier New" pitchFamily="34" charset="0"/>
                 <a:ea typeface="Courier New" pitchFamily="34" charset="-122"/>
                 <a:cs typeface="Courier New" pitchFamily="34" charset="-120"/>
               </a:rPr>
-              <a:t>dotnet user-secrets set \</a:t>
-            </a:r>
-            <a:endParaRPr lang="en-US" sz="1500" dirty="0"/>
-          </a:p>
-          <a:p>
-            <a:pPr indent="0" marL="0">
-              <a:lnSpc>
-                <a:spcPct val="135000"/>
-              </a:lnSpc>
-              <a:buNone/>
-            </a:pPr>
-            <a:r>
-              <a:rPr lang="en-US" sz="1500" dirty="0">
-                <a:solidFill>
-                  <a:srgbClr val="E9E5DD"/>
-                </a:solidFill>
-                <a:latin typeface="Courier New" pitchFamily="34" charset="0"/>
-                <a:ea typeface="Courier New" pitchFamily="34" charset="-122"/>
-                <a:cs typeface="Courier New" pitchFamily="34" charset="-120"/>
-              </a:rPr>
-              <a:t>    "Anthropic:ApiKey" </a:t>
-            </a:r>
-            <a:pPr indent="0" marL="0">
-              <a:lnSpc>
-                <a:spcPct val="135000"/>
-              </a:lnSpc>
-              <a:buNone/>
-            </a:pPr>
-            <a:r>
-              <a:rPr lang="en-US" sz="1500" dirty="0">
-                <a:solidFill>
-                  <a:srgbClr val="E0A04A"/>
-                </a:solidFill>
-                <a:latin typeface="Courier New" pitchFamily="34" charset="0"/>
-                <a:ea typeface="Courier New" pitchFamily="34" charset="-122"/>
-                <a:cs typeface="Courier New" pitchFamily="34" charset="-120"/>
-              </a:rPr>
-              <a:t>"sk-ant-..."</a:t>
-            </a:r>
-            <a:endParaRPr lang="en-US" sz="1500" dirty="0"/>
-          </a:p>
-          <a:p>
-            <a:pPr indent="0" marL="0">
-              <a:lnSpc>
-                <a:spcPct val="135000"/>
-              </a:lnSpc>
-              <a:buNone/>
-            </a:pPr>
-            <a:r>
-              <a:rPr lang="en-US" sz="1500" dirty="0">
-                <a:solidFill>
-                  <a:srgbClr val="9A958B"/>
-                </a:solidFill>
-                <a:latin typeface="Courier New" pitchFamily="34" charset="0"/>
-                <a:ea typeface="Courier New" pitchFamily="34" charset="-122"/>
-                <a:cs typeface="Courier New" pitchFamily="34" charset="-120"/>
-              </a:rPr>
               <a:t># never commit it — secrets stay out of git</a:t>
             </a:r>
             <a:endParaRPr lang="en-US" sz="1500" dirty="0"/>
@@ -8613,7 +8197,7 @@
           <a:bodyPr wrap="square" lIns="0" tIns="0" rIns="0" bIns="0" rtlCol="0" anchor="ctr"/>
           <a:lstStyle/>
           <a:p>
-            <a:pPr indent="0" marL="0">
+            <a:pPr marL="0" indent="0">
               <a:buNone/>
             </a:pPr>
             <a:r>
@@ -8652,7 +8236,7 @@
           <a:bodyPr wrap="square" rtlCol="0" anchor="ctr"/>
           <a:lstStyle/>
           <a:p>
-            <a:pPr indent="0" marL="0">
+            <a:pPr marL="0" indent="0">
               <a:buNone/>
             </a:pPr>
             <a:r>
@@ -8691,7 +8275,7 @@
           <a:bodyPr wrap="square" rtlCol="0" anchor="ctr"/>
           <a:lstStyle/>
           <a:p>
-            <a:pPr algn="r" indent="0" marL="0">
+            <a:pPr marL="0" indent="0" algn="r">
               <a:buNone/>
             </a:pPr>
             <a:r>
@@ -8706,45 +8290,6 @@
               <a:t>Day 2  ·  7/11</a:t>
             </a:r>
             <a:endParaRPr lang="en-US" sz="900" dirty="0"/>
-          </a:p>
-        </p:txBody>
-      </p:sp>
-      <p:sp>
-        <p:nvSpPr>
-          <p:cNvPr id="13" name="Text 11"/>
-          <p:cNvSpPr/>
-          <p:nvPr/>
-        </p:nvSpPr>
-        <p:spPr>
-          <a:xfrm>
-            <a:off x="548640" y="4462272"/>
-            <a:ext cx="8046720" cy="274320"/>
-          </a:xfrm>
-          <a:prstGeom prst="rect">
-            <a:avLst/>
-          </a:prstGeom>
-          <a:noFill/>
-          <a:ln/>
-        </p:spPr>
-        <p:txBody>
-          <a:bodyPr wrap="square" lIns="0" tIns="0" rIns="0" bIns="0" rtlCol="0" anchor="ctr"/>
-          <a:lstStyle/>
-          <a:p>
-            <a:pPr indent="0" marL="0">
-              <a:buNone/>
-            </a:pPr>
-            <a:r>
-              <a:rPr lang="en-US" sz="1000" i="1" dirty="0">
-                <a:solidFill>
-                  <a:srgbClr val="615C52"/>
-                </a:solidFill>
-                <a:latin typeface="Inter" pitchFamily="34" charset="0"/>
-                <a:ea typeface="Inter" pitchFamily="34" charset="-122"/>
-                <a:cs typeface="Inter" pitchFamily="34" charset="-120"/>
-              </a:rPr>
-              <a:t>▸ Run this live; stress that the key never lands in source control.</a:t>
-            </a:r>
-            <a:endParaRPr lang="en-US" sz="1000" dirty="0"/>
           </a:p>
         </p:txBody>
       </p:sp>
@@ -8764,6 +8309,7 @@
         <a:solidFill>
           <a:srgbClr val="F0EEE6"/>
         </a:solidFill>
+        <a:effectLst/>
       </p:bgPr>
     </p:bg>
     <p:spTree>
@@ -8801,11 +8347,11 @@
           <a:bodyPr wrap="square" lIns="0" tIns="0" rIns="0" bIns="0" rtlCol="0" anchor="ctr"/>
           <a:lstStyle/>
           <a:p>
-            <a:pPr indent="0" marL="0">
-              <a:buNone/>
-            </a:pPr>
-            <a:r>
-              <a:rPr lang="en-US" sz="1100" b="1" spc="200" kern="0" dirty="0">
+            <a:pPr marL="0" indent="0">
+              <a:buNone/>
+            </a:pPr>
+            <a:r>
+              <a:rPr lang="en-US" sz="1100" b="1" kern="0" spc="200" dirty="0">
                 <a:solidFill>
                   <a:srgbClr val="C25E40"/>
                 </a:solidFill>
@@ -8840,7 +8386,7 @@
           <a:bodyPr wrap="square" lIns="0" tIns="0" rIns="0" bIns="0" rtlCol="0" anchor="ctr"/>
           <a:lstStyle/>
           <a:p>
-            <a:pPr indent="0" marL="0">
+            <a:pPr marL="0" indent="0">
               <a:buNone/>
             </a:pPr>
             <a:r>
@@ -8877,17 +8423,24 @@
           </a:solidFill>
           <a:ln/>
         </p:spPr>
+        <p:txBody>
+          <a:bodyPr/>
+          <a:lstStyle/>
+          <a:p>
+            <a:endParaRPr lang="en-US"/>
+          </a:p>
+        </p:txBody>
       </p:sp>
       <p:pic>
         <p:nvPicPr>
-          <p:cNvPr id="5" name="Image 0" descr="preencoded.png">    </p:cNvPr>
+          <p:cNvPr id="5" name="Image 0" descr="preencoded.png"/>
           <p:cNvPicPr>
             <a:picLocks noChangeAspect="1"/>
           </p:cNvPicPr>
           <p:nvPr/>
         </p:nvPicPr>
         <p:blipFill>
-          <a:blip r:embed="rId1"/>
+          <a:blip r:embed="rId2"/>
           <a:stretch>
             <a:fillRect/>
           </a:stretch>
@@ -8923,7 +8476,7 @@
           <a:bodyPr wrap="square" lIns="0" tIns="0" rIns="0" bIns="0" rtlCol="0" anchor="ctr"/>
           <a:lstStyle/>
           <a:p>
-            <a:pPr indent="0" marL="0">
+            <a:pPr marL="0" indent="0">
               <a:buNone/>
             </a:pPr>
             <a:r>
@@ -8937,9 +8490,6 @@
               </a:rPr>
               <a:t>Swap cloud embeddings for local </a:t>
             </a:r>
-            <a:pPr indent="0" marL="0">
-              <a:buNone/>
-            </a:pPr>
             <a:r>
               <a:rPr lang="en-US" sz="2200" b="1" dirty="0">
                 <a:solidFill>
@@ -8951,9 +8501,6 @@
               </a:rPr>
               <a:t>Ollama</a:t>
             </a:r>
-            <a:pPr indent="0" marL="0">
-              <a:buNone/>
-            </a:pPr>
             <a:r>
               <a:rPr lang="en-US" sz="2200" b="1" dirty="0">
                 <a:solidFill>
@@ -8995,6 +8542,13 @@
             <a:prstDash val="solid"/>
           </a:ln>
         </p:spPr>
+        <p:txBody>
+          <a:bodyPr/>
+          <a:lstStyle/>
+          <a:p>
+            <a:endParaRPr lang="en-US"/>
+          </a:p>
+        </p:txBody>
       </p:sp>
       <p:sp>
         <p:nvSpPr>
@@ -9015,17 +8569,24 @@
           </a:solidFill>
           <a:ln/>
         </p:spPr>
+        <p:txBody>
+          <a:bodyPr/>
+          <a:lstStyle/>
+          <a:p>
+            <a:endParaRPr lang="en-US"/>
+          </a:p>
+        </p:txBody>
       </p:sp>
       <p:pic>
         <p:nvPicPr>
-          <p:cNvPr id="9" name="Image 1" descr="preencoded.png">    </p:cNvPr>
+          <p:cNvPr id="9" name="Image 1" descr="preencoded.png"/>
           <p:cNvPicPr>
             <a:picLocks noChangeAspect="1"/>
           </p:cNvPicPr>
           <p:nvPr/>
         </p:nvPicPr>
         <p:blipFill>
-          <a:blip r:embed="rId2"/>
+          <a:blip r:embed="rId3"/>
           <a:stretch>
             <a:fillRect/>
           </a:stretch>
@@ -9061,7 +8622,7 @@
           <a:bodyPr wrap="square" lIns="0" tIns="0" rIns="0" bIns="0" rtlCol="0" anchor="ctr"/>
           <a:lstStyle/>
           <a:p>
-            <a:pPr indent="0" marL="0">
+            <a:pPr marL="0" indent="0">
               <a:buNone/>
             </a:pPr>
             <a:r>
@@ -9100,7 +8661,7 @@
           <a:bodyPr wrap="square" lIns="0" tIns="0" rIns="0" bIns="0" rtlCol="0" anchor="ctr"/>
           <a:lstStyle/>
           <a:p>
-            <a:pPr indent="0" marL="0">
+            <a:pPr marL="0" indent="0">
               <a:buNone/>
             </a:pPr>
             <a:r>
@@ -9144,6 +8705,13 @@
             <a:prstDash val="solid"/>
           </a:ln>
         </p:spPr>
+        <p:txBody>
+          <a:bodyPr/>
+          <a:lstStyle/>
+          <a:p>
+            <a:endParaRPr lang="en-US"/>
+          </a:p>
+        </p:txBody>
       </p:sp>
       <p:sp>
         <p:nvSpPr>
@@ -9164,17 +8732,24 @@
           </a:solidFill>
           <a:ln/>
         </p:spPr>
+        <p:txBody>
+          <a:bodyPr/>
+          <a:lstStyle/>
+          <a:p>
+            <a:endParaRPr lang="en-US"/>
+          </a:p>
+        </p:txBody>
       </p:sp>
       <p:pic>
         <p:nvPicPr>
-          <p:cNvPr id="14" name="Image 2" descr="preencoded.png">    </p:cNvPr>
+          <p:cNvPr id="14" name="Image 2" descr="preencoded.png"/>
           <p:cNvPicPr>
             <a:picLocks noChangeAspect="1"/>
           </p:cNvPicPr>
           <p:nvPr/>
         </p:nvPicPr>
         <p:blipFill>
-          <a:blip r:embed="rId3"/>
+          <a:blip r:embed="rId4"/>
           <a:stretch>
             <a:fillRect/>
           </a:stretch>
@@ -9210,7 +8785,7 @@
           <a:bodyPr wrap="square" lIns="0" tIns="0" rIns="0" bIns="0" rtlCol="0" anchor="ctr"/>
           <a:lstStyle/>
           <a:p>
-            <a:pPr indent="0" marL="0">
+            <a:pPr marL="0" indent="0">
               <a:buNone/>
             </a:pPr>
             <a:r>
@@ -9249,7 +8824,7 @@
           <a:bodyPr wrap="square" lIns="0" tIns="0" rIns="0" bIns="0" rtlCol="0" anchor="ctr"/>
           <a:lstStyle/>
           <a:p>
-            <a:pPr indent="0" marL="0">
+            <a:pPr marL="0" indent="0">
               <a:buNone/>
             </a:pPr>
             <a:r>
@@ -9293,6 +8868,13 @@
             <a:prstDash val="solid"/>
           </a:ln>
         </p:spPr>
+        <p:txBody>
+          <a:bodyPr/>
+          <a:lstStyle/>
+          <a:p>
+            <a:endParaRPr lang="en-US"/>
+          </a:p>
+        </p:txBody>
       </p:sp>
       <p:sp>
         <p:nvSpPr>
@@ -9313,17 +8895,24 @@
           </a:solidFill>
           <a:ln/>
         </p:spPr>
+        <p:txBody>
+          <a:bodyPr/>
+          <a:lstStyle/>
+          <a:p>
+            <a:endParaRPr lang="en-US"/>
+          </a:p>
+        </p:txBody>
       </p:sp>
       <p:pic>
         <p:nvPicPr>
-          <p:cNvPr id="19" name="Image 3" descr="preencoded.png">    </p:cNvPr>
+          <p:cNvPr id="19" name="Image 3" descr="preencoded.png"/>
           <p:cNvPicPr>
             <a:picLocks noChangeAspect="1"/>
           </p:cNvPicPr>
           <p:nvPr/>
         </p:nvPicPr>
         <p:blipFill>
-          <a:blip r:embed="rId4"/>
+          <a:blip r:embed="rId5"/>
           <a:stretch>
             <a:fillRect/>
           </a:stretch>
@@ -9359,7 +8948,7 @@
           <a:bodyPr wrap="square" lIns="0" tIns="0" rIns="0" bIns="0" rtlCol="0" anchor="ctr"/>
           <a:lstStyle/>
           <a:p>
-            <a:pPr indent="0" marL="0">
+            <a:pPr marL="0" indent="0">
               <a:buNone/>
             </a:pPr>
             <a:r>
@@ -9398,7 +8987,7 @@
           <a:bodyPr wrap="square" lIns="0" tIns="0" rIns="0" bIns="0" rtlCol="0" anchor="ctr"/>
           <a:lstStyle/>
           <a:p>
-            <a:pPr indent="0" marL="0">
+            <a:pPr marL="0" indent="0">
               <a:buNone/>
             </a:pPr>
             <a:r>
@@ -9437,7 +9026,7 @@
           <a:bodyPr wrap="square" rtlCol="0" anchor="ctr"/>
           <a:lstStyle/>
           <a:p>
-            <a:pPr indent="0" marL="0">
+            <a:pPr marL="0" indent="0">
               <a:buNone/>
             </a:pPr>
             <a:r>
@@ -9476,7 +9065,7 @@
           <a:bodyPr wrap="square" rtlCol="0" anchor="ctr"/>
           <a:lstStyle/>
           <a:p>
-            <a:pPr algn="r" indent="0" marL="0">
+            <a:pPr marL="0" indent="0" algn="r">
               <a:buNone/>
             </a:pPr>
             <a:r>
@@ -9491,45 +9080,6 @@
               <a:t>Day 2  ·  8/11</a:t>
             </a:r>
             <a:endParaRPr lang="en-US" sz="900" dirty="0"/>
-          </a:p>
-        </p:txBody>
-      </p:sp>
-      <p:sp>
-        <p:nvSpPr>
-          <p:cNvPr id="24" name="Text 18"/>
-          <p:cNvSpPr/>
-          <p:nvPr/>
-        </p:nvSpPr>
-        <p:spPr>
-          <a:xfrm>
-            <a:off x="548640" y="4462272"/>
-            <a:ext cx="8046720" cy="274320"/>
-          </a:xfrm>
-          <a:prstGeom prst="rect">
-            <a:avLst/>
-          </a:prstGeom>
-          <a:noFill/>
-          <a:ln/>
-        </p:spPr>
-        <p:txBody>
-          <a:bodyPr wrap="square" lIns="0" tIns="0" rIns="0" bIns="0" rtlCol="0" anchor="ctr"/>
-          <a:lstStyle/>
-          <a:p>
-            <a:pPr indent="0" marL="0">
-              <a:buNone/>
-            </a:pPr>
-            <a:r>
-              <a:rPr lang="en-US" sz="1000" i="1" dirty="0">
-                <a:solidFill>
-                  <a:srgbClr val="615C52"/>
-                </a:solidFill>
-                <a:latin typeface="Inter" pitchFamily="34" charset="0"/>
-                <a:ea typeface="Inter" pitchFamily="34" charset="-122"/>
-                <a:cs typeface="Inter" pitchFamily="34" charset="-120"/>
-              </a:rPr>
-              <a:t>▸ Behind one interface: Anthropic in the cloud or Ollama locally — your choice.</a:t>
-            </a:r>
-            <a:endParaRPr lang="en-US" sz="1000" dirty="0"/>
           </a:p>
         </p:txBody>
       </p:sp>
@@ -9549,6 +9099,7 @@
         <a:solidFill>
           <a:srgbClr val="F0EEE6"/>
         </a:solidFill>
+        <a:effectLst/>
       </p:bgPr>
     </p:bg>
     <p:spTree>
@@ -9586,11 +9137,11 @@
           <a:bodyPr wrap="square" lIns="0" tIns="0" rIns="0" bIns="0" rtlCol="0" anchor="ctr"/>
           <a:lstStyle/>
           <a:p>
-            <a:pPr indent="0" marL="0">
-              <a:buNone/>
-            </a:pPr>
-            <a:r>
-              <a:rPr lang="en-US" sz="1100" b="1" spc="200" kern="0" dirty="0">
+            <a:pPr marL="0" indent="0">
+              <a:buNone/>
+            </a:pPr>
+            <a:r>
+              <a:rPr lang="en-US" sz="1100" b="1" kern="0" spc="200" dirty="0">
                 <a:solidFill>
                   <a:srgbClr val="C25E40"/>
                 </a:solidFill>
@@ -9625,7 +9176,7 @@
           <a:bodyPr wrap="square" lIns="0" tIns="0" rIns="0" bIns="0" rtlCol="0" anchor="ctr"/>
           <a:lstStyle/>
           <a:p>
-            <a:pPr indent="0" marL="0">
+            <a:pPr marL="0" indent="0">
               <a:buNone/>
             </a:pPr>
             <a:r>
@@ -9669,13 +9220,20 @@
             <a:prstDash val="solid"/>
           </a:ln>
           <a:effectLst>
-            <a:outerShdw sx="100000" sy="100000" kx="0" ky="0" algn="bl" rotWithShape="0" blurRad="88900" dist="38100" dir="5400000">
+            <a:outerShdw blurRad="88900" dist="38100" dir="5400000" algn="bl" rotWithShape="0">
               <a:srgbClr val="000000">
                 <a:alpha val="10000"/>
               </a:srgbClr>
             </a:outerShdw>
           </a:effectLst>
         </p:spPr>
+        <p:txBody>
+          <a:bodyPr/>
+          <a:lstStyle/>
+          <a:p>
+            <a:endParaRPr lang="en-US"/>
+          </a:p>
+        </p:txBody>
       </p:sp>
       <p:sp>
         <p:nvSpPr>
@@ -9696,17 +9254,24 @@
           </a:solidFill>
           <a:ln/>
         </p:spPr>
+        <p:txBody>
+          <a:bodyPr/>
+          <a:lstStyle/>
+          <a:p>
+            <a:endParaRPr lang="en-US"/>
+          </a:p>
+        </p:txBody>
       </p:sp>
       <p:pic>
         <p:nvPicPr>
-          <p:cNvPr id="6" name="Image 0" descr="preencoded.png">    </p:cNvPr>
+          <p:cNvPr id="6" name="Image 0" descr="preencoded.png"/>
           <p:cNvPicPr>
             <a:picLocks noChangeAspect="1"/>
           </p:cNvPicPr>
           <p:nvPr/>
         </p:nvPicPr>
         <p:blipFill>
-          <a:blip r:embed="rId1"/>
+          <a:blip r:embed="rId2"/>
           <a:stretch>
             <a:fillRect/>
           </a:stretch>
@@ -9742,7 +9307,7 @@
           <a:bodyPr wrap="square" lIns="0" tIns="0" rIns="0" bIns="0" rtlCol="0" anchor="ctr"/>
           <a:lstStyle/>
           <a:p>
-            <a:pPr indent="0" marL="0">
+            <a:pPr marL="0" indent="0">
               <a:buNone/>
             </a:pPr>
             <a:r>
@@ -9781,7 +9346,7 @@
           <a:bodyPr wrap="square" lIns="0" tIns="0" rIns="0" bIns="0" rtlCol="0" anchor="ctr"/>
           <a:lstStyle/>
           <a:p>
-            <a:pPr indent="0" marL="0">
+            <a:pPr marL="0" indent="0">
               <a:buNone/>
             </a:pPr>
             <a:r>
@@ -9825,13 +9390,20 @@
             <a:prstDash val="solid"/>
           </a:ln>
           <a:effectLst>
-            <a:outerShdw sx="100000" sy="100000" kx="0" ky="0" algn="bl" rotWithShape="0" blurRad="88900" dist="38100" dir="5400000">
+            <a:outerShdw blurRad="88900" dist="38100" dir="5400000" algn="bl" rotWithShape="0">
               <a:srgbClr val="000000">
                 <a:alpha val="10000"/>
               </a:srgbClr>
             </a:outerShdw>
           </a:effectLst>
         </p:spPr>
+        <p:txBody>
+          <a:bodyPr/>
+          <a:lstStyle/>
+          <a:p>
+            <a:endParaRPr lang="en-US"/>
+          </a:p>
+        </p:txBody>
       </p:sp>
       <p:sp>
         <p:nvSpPr>
@@ -9852,17 +9424,24 @@
           </a:solidFill>
           <a:ln/>
         </p:spPr>
+        <p:txBody>
+          <a:bodyPr/>
+          <a:lstStyle/>
+          <a:p>
+            <a:endParaRPr lang="en-US"/>
+          </a:p>
+        </p:txBody>
       </p:sp>
       <p:pic>
         <p:nvPicPr>
-          <p:cNvPr id="11" name="Image 1" descr="preencoded.png">    </p:cNvPr>
+          <p:cNvPr id="11" name="Image 1" descr="preencoded.png"/>
           <p:cNvPicPr>
             <a:picLocks noChangeAspect="1"/>
           </p:cNvPicPr>
           <p:nvPr/>
         </p:nvPicPr>
         <p:blipFill>
-          <a:blip r:embed="rId2"/>
+          <a:blip r:embed="rId3"/>
           <a:stretch>
             <a:fillRect/>
           </a:stretch>
@@ -9898,7 +9477,7 @@
           <a:bodyPr wrap="square" lIns="0" tIns="0" rIns="0" bIns="0" rtlCol="0" anchor="ctr"/>
           <a:lstStyle/>
           <a:p>
-            <a:pPr indent="0" marL="0">
+            <a:pPr marL="0" indent="0">
               <a:buNone/>
             </a:pPr>
             <a:r>
@@ -9937,7 +9516,7 @@
           <a:bodyPr wrap="square" lIns="0" tIns="0" rIns="0" bIns="0" rtlCol="0" anchor="ctr"/>
           <a:lstStyle/>
           <a:p>
-            <a:pPr indent="0" marL="0">
+            <a:pPr marL="0" indent="0">
               <a:buNone/>
             </a:pPr>
             <a:r>
@@ -9981,13 +9560,20 @@
             <a:prstDash val="solid"/>
           </a:ln>
           <a:effectLst>
-            <a:outerShdw sx="100000" sy="100000" kx="0" ky="0" algn="bl" rotWithShape="0" blurRad="88900" dist="38100" dir="5400000">
+            <a:outerShdw blurRad="88900" dist="38100" dir="5400000" algn="bl" rotWithShape="0">
               <a:srgbClr val="000000">
                 <a:alpha val="10000"/>
               </a:srgbClr>
             </a:outerShdw>
           </a:effectLst>
         </p:spPr>
+        <p:txBody>
+          <a:bodyPr/>
+          <a:lstStyle/>
+          <a:p>
+            <a:endParaRPr lang="en-US"/>
+          </a:p>
+        </p:txBody>
       </p:sp>
       <p:sp>
         <p:nvSpPr>
@@ -10008,17 +9594,24 @@
           </a:solidFill>
           <a:ln/>
         </p:spPr>
+        <p:txBody>
+          <a:bodyPr/>
+          <a:lstStyle/>
+          <a:p>
+            <a:endParaRPr lang="en-US"/>
+          </a:p>
+        </p:txBody>
       </p:sp>
       <p:pic>
         <p:nvPicPr>
-          <p:cNvPr id="16" name="Image 2" descr="preencoded.png">    </p:cNvPr>
+          <p:cNvPr id="16" name="Image 2" descr="preencoded.png"/>
           <p:cNvPicPr>
             <a:picLocks noChangeAspect="1"/>
           </p:cNvPicPr>
           <p:nvPr/>
         </p:nvPicPr>
         <p:blipFill>
-          <a:blip r:embed="rId3"/>
+          <a:blip r:embed="rId4"/>
           <a:stretch>
             <a:fillRect/>
           </a:stretch>
@@ -10054,7 +9647,7 @@
           <a:bodyPr wrap="square" lIns="0" tIns="0" rIns="0" bIns="0" rtlCol="0" anchor="ctr"/>
           <a:lstStyle/>
           <a:p>
-            <a:pPr indent="0" marL="0">
+            <a:pPr marL="0" indent="0">
               <a:buNone/>
             </a:pPr>
             <a:r>
@@ -10093,7 +9686,7 @@
           <a:bodyPr wrap="square" lIns="0" tIns="0" rIns="0" bIns="0" rtlCol="0" anchor="ctr"/>
           <a:lstStyle/>
           <a:p>
-            <a:pPr indent="0" marL="0">
+            <a:pPr marL="0" indent="0">
               <a:buNone/>
             </a:pPr>
             <a:r>
@@ -10137,13 +9730,20 @@
             <a:prstDash val="solid"/>
           </a:ln>
           <a:effectLst>
-            <a:outerShdw sx="100000" sy="100000" kx="0" ky="0" algn="bl" rotWithShape="0" blurRad="88900" dist="38100" dir="5400000">
+            <a:outerShdw blurRad="88900" dist="38100" dir="5400000" algn="bl" rotWithShape="0">
               <a:srgbClr val="000000">
                 <a:alpha val="10000"/>
               </a:srgbClr>
             </a:outerShdw>
           </a:effectLst>
         </p:spPr>
+        <p:txBody>
+          <a:bodyPr/>
+          <a:lstStyle/>
+          <a:p>
+            <a:endParaRPr lang="en-US"/>
+          </a:p>
+        </p:txBody>
       </p:sp>
       <p:sp>
         <p:nvSpPr>
@@ -10164,17 +9764,24 @@
           </a:solidFill>
           <a:ln/>
         </p:spPr>
+        <p:txBody>
+          <a:bodyPr/>
+          <a:lstStyle/>
+          <a:p>
+            <a:endParaRPr lang="en-US"/>
+          </a:p>
+        </p:txBody>
       </p:sp>
       <p:pic>
         <p:nvPicPr>
-          <p:cNvPr id="21" name="Image 3" descr="preencoded.png">    </p:cNvPr>
+          <p:cNvPr id="21" name="Image 3" descr="preencoded.png"/>
           <p:cNvPicPr>
             <a:picLocks noChangeAspect="1"/>
           </p:cNvPicPr>
           <p:nvPr/>
         </p:nvPicPr>
         <p:blipFill>
-          <a:blip r:embed="rId4"/>
+          <a:blip r:embed="rId5"/>
           <a:stretch>
             <a:fillRect/>
           </a:stretch>
@@ -10210,7 +9817,7 @@
           <a:bodyPr wrap="square" lIns="0" tIns="0" rIns="0" bIns="0" rtlCol="0" anchor="ctr"/>
           <a:lstStyle/>
           <a:p>
-            <a:pPr indent="0" marL="0">
+            <a:pPr marL="0" indent="0">
               <a:buNone/>
             </a:pPr>
             <a:r>
@@ -10249,7 +9856,7 @@
           <a:bodyPr wrap="square" lIns="0" tIns="0" rIns="0" bIns="0" rtlCol="0" anchor="ctr"/>
           <a:lstStyle/>
           <a:p>
-            <a:pPr indent="0" marL="0">
+            <a:pPr marL="0" indent="0">
               <a:buNone/>
             </a:pPr>
             <a:r>
@@ -10293,13 +9900,20 @@
             <a:prstDash val="solid"/>
           </a:ln>
           <a:effectLst>
-            <a:outerShdw sx="100000" sy="100000" kx="0" ky="0" algn="bl" rotWithShape="0" blurRad="88900" dist="38100" dir="5400000">
+            <a:outerShdw blurRad="88900" dist="38100" dir="5400000" algn="bl" rotWithShape="0">
               <a:srgbClr val="000000">
                 <a:alpha val="10000"/>
               </a:srgbClr>
             </a:outerShdw>
           </a:effectLst>
         </p:spPr>
+        <p:txBody>
+          <a:bodyPr/>
+          <a:lstStyle/>
+          <a:p>
+            <a:endParaRPr lang="en-US"/>
+          </a:p>
+        </p:txBody>
       </p:sp>
       <p:sp>
         <p:nvSpPr>
@@ -10320,17 +9934,24 @@
           </a:solidFill>
           <a:ln/>
         </p:spPr>
+        <p:txBody>
+          <a:bodyPr/>
+          <a:lstStyle/>
+          <a:p>
+            <a:endParaRPr lang="en-US"/>
+          </a:p>
+        </p:txBody>
       </p:sp>
       <p:pic>
         <p:nvPicPr>
-          <p:cNvPr id="26" name="Image 4" descr="preencoded.png">    </p:cNvPr>
+          <p:cNvPr id="26" name="Image 4" descr="preencoded.png"/>
           <p:cNvPicPr>
             <a:picLocks noChangeAspect="1"/>
           </p:cNvPicPr>
           <p:nvPr/>
         </p:nvPicPr>
         <p:blipFill>
-          <a:blip r:embed="rId5"/>
+          <a:blip r:embed="rId6"/>
           <a:stretch>
             <a:fillRect/>
           </a:stretch>
@@ -10366,7 +9987,7 @@
           <a:bodyPr wrap="square" lIns="0" tIns="0" rIns="0" bIns="0" rtlCol="0" anchor="ctr"/>
           <a:lstStyle/>
           <a:p>
-            <a:pPr indent="0" marL="0">
+            <a:pPr marL="0" indent="0">
               <a:buNone/>
             </a:pPr>
             <a:r>
@@ -10405,7 +10026,7 @@
           <a:bodyPr wrap="square" lIns="0" tIns="0" rIns="0" bIns="0" rtlCol="0" anchor="ctr"/>
           <a:lstStyle/>
           <a:p>
-            <a:pPr indent="0" marL="0">
+            <a:pPr marL="0" indent="0">
               <a:buNone/>
             </a:pPr>
             <a:r>
@@ -10449,13 +10070,20 @@
             <a:prstDash val="solid"/>
           </a:ln>
           <a:effectLst>
-            <a:outerShdw sx="100000" sy="100000" kx="0" ky="0" algn="bl" rotWithShape="0" blurRad="88900" dist="38100" dir="5400000">
+            <a:outerShdw blurRad="88900" dist="38100" dir="5400000" algn="bl" rotWithShape="0">
               <a:srgbClr val="000000">
                 <a:alpha val="10000"/>
               </a:srgbClr>
             </a:outerShdw>
           </a:effectLst>
         </p:spPr>
+        <p:txBody>
+          <a:bodyPr/>
+          <a:lstStyle/>
+          <a:p>
+            <a:endParaRPr lang="en-US"/>
+          </a:p>
+        </p:txBody>
       </p:sp>
       <p:sp>
         <p:nvSpPr>
@@ -10476,17 +10104,24 @@
           </a:solidFill>
           <a:ln/>
         </p:spPr>
+        <p:txBody>
+          <a:bodyPr/>
+          <a:lstStyle/>
+          <a:p>
+            <a:endParaRPr lang="en-US"/>
+          </a:p>
+        </p:txBody>
       </p:sp>
       <p:pic>
         <p:nvPicPr>
-          <p:cNvPr id="31" name="Image 5" descr="preencoded.png">    </p:cNvPr>
+          <p:cNvPr id="31" name="Image 5" descr="preencoded.png"/>
           <p:cNvPicPr>
             <a:picLocks noChangeAspect="1"/>
           </p:cNvPicPr>
           <p:nvPr/>
         </p:nvPicPr>
         <p:blipFill>
-          <a:blip r:embed="rId6"/>
+          <a:blip r:embed="rId7"/>
           <a:stretch>
             <a:fillRect/>
           </a:stretch>
@@ -10522,7 +10157,7 @@
           <a:bodyPr wrap="square" lIns="0" tIns="0" rIns="0" bIns="0" rtlCol="0" anchor="ctr"/>
           <a:lstStyle/>
           <a:p>
-            <a:pPr indent="0" marL="0">
+            <a:pPr marL="0" indent="0">
               <a:buNone/>
             </a:pPr>
             <a:r>
@@ -10561,7 +10196,7 @@
           <a:bodyPr wrap="square" lIns="0" tIns="0" rIns="0" bIns="0" rtlCol="0" anchor="ctr"/>
           <a:lstStyle/>
           <a:p>
-            <a:pPr indent="0" marL="0">
+            <a:pPr marL="0" indent="0">
               <a:buNone/>
             </a:pPr>
             <a:r>
@@ -10600,7 +10235,7 @@
           <a:bodyPr wrap="square" rtlCol="0" anchor="ctr"/>
           <a:lstStyle/>
           <a:p>
-            <a:pPr indent="0" marL="0">
+            <a:pPr marL="0" indent="0">
               <a:buNone/>
             </a:pPr>
             <a:r>
@@ -10639,7 +10274,7 @@
           <a:bodyPr wrap="square" rtlCol="0" anchor="ctr"/>
           <a:lstStyle/>
           <a:p>
-            <a:pPr algn="r" indent="0" marL="0">
+            <a:pPr marL="0" indent="0" algn="r">
               <a:buNone/>
             </a:pPr>
             <a:r>
@@ -10654,45 +10289,6 @@
               <a:t>Day 2  ·  9/11</a:t>
             </a:r>
             <a:endParaRPr lang="en-US" sz="900" dirty="0"/>
-          </a:p>
-        </p:txBody>
-      </p:sp>
-      <p:sp>
-        <p:nvSpPr>
-          <p:cNvPr id="36" name="Text 28"/>
-          <p:cNvSpPr/>
-          <p:nvPr/>
-        </p:nvSpPr>
-        <p:spPr>
-          <a:xfrm>
-            <a:off x="548640" y="4462272"/>
-            <a:ext cx="8046720" cy="274320"/>
-          </a:xfrm>
-          <a:prstGeom prst="rect">
-            <a:avLst/>
-          </a:prstGeom>
-          <a:noFill/>
-          <a:ln/>
-        </p:spPr>
-        <p:txBody>
-          <a:bodyPr wrap="square" lIns="0" tIns="0" rIns="0" bIns="0" rtlCol="0" anchor="ctr"/>
-          <a:lstStyle/>
-          <a:p>
-            <a:pPr indent="0" marL="0">
-              <a:buNone/>
-            </a:pPr>
-            <a:r>
-              <a:rPr lang="en-US" sz="1000" i="1" dirty="0">
-                <a:solidFill>
-                  <a:srgbClr val="615C52"/>
-                </a:solidFill>
-                <a:latin typeface="Inter" pitchFamily="34" charset="0"/>
-                <a:ea typeface="Inter" pitchFamily="34" charset="-122"/>
-                <a:cs typeface="Inter" pitchFamily="34" charset="-120"/>
-              </a:rPr>
-              <a:t>▸ Six shippable artifacts by 5pm — each one extends BookTracker.</a:t>
-            </a:r>
-            <a:endParaRPr lang="en-US" sz="1000" dirty="0"/>
           </a:p>
         </p:txBody>
       </p:sp>

--- a/decks/Day 2/Day2-Anthropic-API-Track.pptx
+++ b/decks/Day 2/Day2-Anthropic-API-Track.pptx
@@ -6708,135 +6708,6 @@
       </p:sp>
       <p:sp>
         <p:nvSpPr>
-          <p:cNvPr id="16" name="Shape 11"/>
-          <p:cNvSpPr/>
-          <p:nvPr/>
-        </p:nvSpPr>
-        <p:spPr>
-          <a:xfrm>
-            <a:off x="566928" y="3749040"/>
-            <a:ext cx="420624" cy="420624"/>
-          </a:xfrm>
-          <a:prstGeom prst="ellipse">
-            <a:avLst/>
-          </a:prstGeom>
-          <a:solidFill>
-            <a:srgbClr val="D97757"/>
-          </a:solidFill>
-          <a:ln/>
-        </p:spPr>
-        <p:txBody>
-          <a:bodyPr/>
-          <a:lstStyle/>
-          <a:p>
-            <a:endParaRPr lang="en-US"/>
-          </a:p>
-        </p:txBody>
-      </p:sp>
-      <p:pic>
-        <p:nvPicPr>
-          <p:cNvPr id="17" name="Image 3" descr="preencoded.png"/>
-          <p:cNvPicPr>
-            <a:picLocks noChangeAspect="1"/>
-          </p:cNvPicPr>
-          <p:nvPr/>
-        </p:nvPicPr>
-        <p:blipFill>
-          <a:blip r:embed="rId5"/>
-          <a:stretch>
-            <a:fillRect/>
-          </a:stretch>
-        </p:blipFill>
-        <p:spPr>
-          <a:xfrm>
-            <a:off x="676290" y="3858402"/>
-            <a:ext cx="201900" cy="201900"/>
-          </a:xfrm>
-          <a:prstGeom prst="rect">
-            <a:avLst/>
-          </a:prstGeom>
-        </p:spPr>
-      </p:pic>
-      <p:sp>
-        <p:nvSpPr>
-          <p:cNvPr id="18" name="Text 12"/>
-          <p:cNvSpPr/>
-          <p:nvPr/>
-        </p:nvSpPr>
-        <p:spPr>
-          <a:xfrm>
-            <a:off x="1133856" y="3712464"/>
-            <a:ext cx="4206240" cy="292608"/>
-          </a:xfrm>
-          <a:prstGeom prst="rect">
-            <a:avLst/>
-          </a:prstGeom>
-          <a:noFill/>
-          <a:ln/>
-        </p:spPr>
-        <p:txBody>
-          <a:bodyPr wrap="square" lIns="0" tIns="0" rIns="0" bIns="0" rtlCol="0" anchor="ctr"/>
-          <a:lstStyle/>
-          <a:p>
-            <a:pPr marL="0" indent="0">
-              <a:buNone/>
-            </a:pPr>
-            <a:r>
-              <a:rPr lang="en-US" sz="1450" b="1" dirty="0">
-                <a:solidFill>
-                  <a:srgbClr val="141413"/>
-                </a:solidFill>
-                <a:latin typeface="Inter" pitchFamily="34" charset="0"/>
-                <a:ea typeface="Inter" pitchFamily="34" charset="-122"/>
-                <a:cs typeface="Inter" pitchFamily="34" charset="-120"/>
-              </a:rPr>
-              <a:t>Trial credit covers the workshop</a:t>
-            </a:r>
-            <a:endParaRPr lang="en-US" sz="1450" dirty="0"/>
-          </a:p>
-        </p:txBody>
-      </p:sp>
-      <p:sp>
-        <p:nvSpPr>
-          <p:cNvPr id="19" name="Text 13"/>
-          <p:cNvSpPr/>
-          <p:nvPr/>
-        </p:nvSpPr>
-        <p:spPr>
-          <a:xfrm>
-            <a:off x="4937760" y="3712464"/>
-            <a:ext cx="3566160" cy="292608"/>
-          </a:xfrm>
-          <a:prstGeom prst="rect">
-            <a:avLst/>
-          </a:prstGeom>
-          <a:noFill/>
-          <a:ln/>
-        </p:spPr>
-        <p:txBody>
-          <a:bodyPr wrap="square" lIns="0" tIns="0" rIns="0" bIns="0" rtlCol="0" anchor="ctr"/>
-          <a:lstStyle/>
-          <a:p>
-            <a:pPr marL="0" indent="0">
-              <a:buNone/>
-            </a:pPr>
-            <a:r>
-              <a:rPr lang="en-US" sz="1250" dirty="0">
-                <a:solidFill>
-                  <a:srgbClr val="615C52"/>
-                </a:solidFill>
-                <a:latin typeface="Inter" pitchFamily="34" charset="0"/>
-                <a:ea typeface="Inter" pitchFamily="34" charset="-122"/>
-                <a:cs typeface="Inter" pitchFamily="34" charset="-120"/>
-              </a:rPr>
-              <a:t>No real spend needed today</a:t>
-            </a:r>
-            <a:endParaRPr lang="en-US" sz="1250" dirty="0"/>
-          </a:p>
-        </p:txBody>
-      </p:sp>
-      <p:sp>
-        <p:nvSpPr>
           <p:cNvPr id="20" name="Text 14"/>
           <p:cNvSpPr/>
           <p:nvPr/>
